--- a/slides/T319_Regressão_Linear (Parte IV).pptx
+++ b/slides/T319_Regressão_Linear (Parte IV).pptx
@@ -562,7 +562,7 @@
           <a:p>
             <a:fld id="{DAF0AF11-6A8A-4E64-94F5-26D4FBA2A01D}" type="datetimeFigureOut">
               <a:rPr lang="nl-BE" smtClean="0"/>
-              <a:t>20/11/2025</a:t>
+              <a:t>24/04/2026</a:t>
             </a:fld>
             <a:endParaRPr lang="nl-BE"/>
           </a:p>
@@ -6367,7 +6367,7 @@
           <a:p>
             <a:fld id="{C80E15A5-E95B-43EB-9AC7-9A96397448C0}" type="datetimeFigureOut">
               <a:rPr lang="nl-BE" smtClean="0"/>
-              <a:t>20/11/2025</a:t>
+              <a:t>24/04/2026</a:t>
             </a:fld>
             <a:endParaRPr lang="nl-BE"/>
           </a:p>
@@ -6537,7 +6537,7 @@
           <a:p>
             <a:fld id="{C80E15A5-E95B-43EB-9AC7-9A96397448C0}" type="datetimeFigureOut">
               <a:rPr lang="nl-BE" smtClean="0"/>
-              <a:t>20/11/2025</a:t>
+              <a:t>24/04/2026</a:t>
             </a:fld>
             <a:endParaRPr lang="nl-BE"/>
           </a:p>
@@ -6717,7 +6717,7 @@
           <a:p>
             <a:fld id="{C80E15A5-E95B-43EB-9AC7-9A96397448C0}" type="datetimeFigureOut">
               <a:rPr lang="nl-BE" smtClean="0"/>
-              <a:t>20/11/2025</a:t>
+              <a:t>24/04/2026</a:t>
             </a:fld>
             <a:endParaRPr lang="nl-BE"/>
           </a:p>
@@ -6887,7 +6887,7 @@
           <a:p>
             <a:fld id="{C80E15A5-E95B-43EB-9AC7-9A96397448C0}" type="datetimeFigureOut">
               <a:rPr lang="nl-BE" smtClean="0"/>
-              <a:t>20/11/2025</a:t>
+              <a:t>24/04/2026</a:t>
             </a:fld>
             <a:endParaRPr lang="nl-BE"/>
           </a:p>
@@ -7133,7 +7133,7 @@
           <a:p>
             <a:fld id="{C80E15A5-E95B-43EB-9AC7-9A96397448C0}" type="datetimeFigureOut">
               <a:rPr lang="nl-BE" smtClean="0"/>
-              <a:t>20/11/2025</a:t>
+              <a:t>24/04/2026</a:t>
             </a:fld>
             <a:endParaRPr lang="nl-BE"/>
           </a:p>
@@ -7365,7 +7365,7 @@
           <a:p>
             <a:fld id="{C80E15A5-E95B-43EB-9AC7-9A96397448C0}" type="datetimeFigureOut">
               <a:rPr lang="nl-BE" smtClean="0"/>
-              <a:t>20/11/2025</a:t>
+              <a:t>24/04/2026</a:t>
             </a:fld>
             <a:endParaRPr lang="nl-BE"/>
           </a:p>
@@ -7732,7 +7732,7 @@
           <a:p>
             <a:fld id="{C80E15A5-E95B-43EB-9AC7-9A96397448C0}" type="datetimeFigureOut">
               <a:rPr lang="nl-BE" smtClean="0"/>
-              <a:t>20/11/2025</a:t>
+              <a:t>24/04/2026</a:t>
             </a:fld>
             <a:endParaRPr lang="nl-BE"/>
           </a:p>
@@ -7850,7 +7850,7 @@
           <a:p>
             <a:fld id="{C80E15A5-E95B-43EB-9AC7-9A96397448C0}" type="datetimeFigureOut">
               <a:rPr lang="nl-BE" smtClean="0"/>
-              <a:t>20/11/2025</a:t>
+              <a:t>24/04/2026</a:t>
             </a:fld>
             <a:endParaRPr lang="nl-BE"/>
           </a:p>
@@ -7945,7 +7945,7 @@
           <a:p>
             <a:fld id="{C80E15A5-E95B-43EB-9AC7-9A96397448C0}" type="datetimeFigureOut">
               <a:rPr lang="nl-BE" smtClean="0"/>
-              <a:t>20/11/2025</a:t>
+              <a:t>24/04/2026</a:t>
             </a:fld>
             <a:endParaRPr lang="nl-BE"/>
           </a:p>
@@ -8222,7 +8222,7 @@
           <a:p>
             <a:fld id="{C80E15A5-E95B-43EB-9AC7-9A96397448C0}" type="datetimeFigureOut">
               <a:rPr lang="nl-BE" smtClean="0"/>
-              <a:t>20/11/2025</a:t>
+              <a:t>24/04/2026</a:t>
             </a:fld>
             <a:endParaRPr lang="nl-BE"/>
           </a:p>
@@ -8475,7 +8475,7 @@
           <a:p>
             <a:fld id="{C80E15A5-E95B-43EB-9AC7-9A96397448C0}" type="datetimeFigureOut">
               <a:rPr lang="nl-BE" smtClean="0"/>
-              <a:t>20/11/2025</a:t>
+              <a:t>24/04/2026</a:t>
             </a:fld>
             <a:endParaRPr lang="nl-BE"/>
           </a:p>
@@ -8688,7 +8688,7 @@
           <a:p>
             <a:fld id="{C80E15A5-E95B-43EB-9AC7-9A96397448C0}" type="datetimeFigureOut">
               <a:rPr lang="nl-BE" smtClean="0"/>
-              <a:t>20/11/2025</a:t>
+              <a:t>24/04/2026</a:t>
             </a:fld>
             <a:endParaRPr lang="nl-BE"/>
           </a:p>
@@ -9318,8 +9318,8 @@
           </a:p>
         </p:txBody>
       </p:sp>
-      <mc:AlternateContent xmlns:mc="http://schemas.openxmlformats.org/markup-compatibility/2006" xmlns:a14="http://schemas.microsoft.com/office/drawing/2010/main">
-        <mc:Choice Requires="a14">
+      <mc:AlternateContent xmlns:mc="http://schemas.openxmlformats.org/markup-compatibility/2006">
+        <mc:Choice xmlns:a14="http://schemas.microsoft.com/office/drawing/2010/main" Requires="a14">
           <p:sp>
             <p:nvSpPr>
               <p:cNvPr id="3" name="Content Placeholder 2"/>
@@ -9835,7 +9835,19 @@
                 </a14:m>
                 <a:r>
                   <a:rPr lang="pt-BR" dirty="0"/>
-                  <a:t> são as estimativas da média e do desvio padrão, respectivamente, </a:t>
+                  <a:t> são as </a:t>
+                </a:r>
+                <a:r>
+                  <a:rPr lang="pt-BR" b="1" i="1" dirty="0">
+                    <a:solidFill>
+                      <a:srgbClr val="0070C0"/>
+                    </a:solidFill>
+                  </a:rPr>
+                  <a:t>estimativas</a:t>
+                </a:r>
+                <a:r>
+                  <a:rPr lang="pt-BR" dirty="0"/>
+                  <a:t> da média e do desvio padrão, respectivamente, </a:t>
                 </a:r>
                 <a:r>
                   <a:rPr lang="pt-BR" b="1" i="1" dirty="0">
@@ -9907,7 +9919,7 @@
             </p:txBody>
           </p:sp>
         </mc:Choice>
-        <mc:Fallback xmlns="">
+        <mc:Fallback>
           <p:sp>
             <p:nvSpPr>
               <p:cNvPr id="3" name="Content Placeholder 2"/>
@@ -9935,7 +9947,7 @@
               <a:lstStyle/>
               <a:p>
                 <a:r>
-                  <a:rPr lang="pt-BR">
+                  <a:rPr lang="en-US">
                     <a:noFill/>
                   </a:rPr>
                   <a:t> </a:t>
@@ -26890,8 +26902,8 @@
           </a:p>
         </p:txBody>
       </p:sp>
-      <mc:AlternateContent xmlns:mc="http://schemas.openxmlformats.org/markup-compatibility/2006" xmlns:a14="http://schemas.microsoft.com/office/drawing/2010/main">
-        <mc:Choice Requires="a14">
+      <mc:AlternateContent xmlns:mc="http://schemas.openxmlformats.org/markup-compatibility/2006">
+        <mc:Choice xmlns:a14="http://schemas.microsoft.com/office/drawing/2010/main" Requires="a14">
           <p:sp>
             <p:nvSpPr>
               <p:cNvPr id="3" name="Espaço Reservado para Conteúdo 2">
@@ -26910,8 +26922,8 @@
             </p:nvSpPr>
             <p:spPr>
               <a:xfrm>
-                <a:off x="6760396" y="1825624"/>
-                <a:ext cx="5260367" cy="5032375"/>
+                <a:off x="6647952" y="1825624"/>
+                <a:ext cx="5465280" cy="5032375"/>
               </a:xfrm>
             </p:spPr>
             <p:txBody>
@@ -27026,31 +27038,7 @@
                     </a:solidFill>
                     <a:effectLst/>
                   </a:rPr>
-                  <a:t>em algumas direções (i.e., inclinação </a:t>
-                </a:r>
-                <a14:m>
-                  <m:oMath xmlns:m="http://schemas.openxmlformats.org/officeDocument/2006/math">
-                    <m:r>
-                      <a:rPr lang="pt-BR" b="0" i="1" smtClean="0">
-                        <a:solidFill>
-                          <a:schemeClr val="tx1"/>
-                        </a:solidFill>
-                        <a:effectLst/>
-                        <a:latin typeface="Cambria Math" panose="02040503050406030204" pitchFamily="18" charset="0"/>
-                        <a:ea typeface="Cambria Math" panose="02040503050406030204" pitchFamily="18" charset="0"/>
-                      </a:rPr>
-                      <m:t>≈0</m:t>
-                    </m:r>
-                  </m:oMath>
-                </a14:m>
-                <a:r>
-                  <a:rPr lang="pt-BR" b="0" i="0" dirty="0">
-                    <a:solidFill>
-                      <a:schemeClr val="tx1"/>
-                    </a:solidFill>
-                    <a:effectLst/>
-                  </a:rPr>
-                  <a:t>).</a:t>
+                  <a:t>em algumas direções (i.e.,).</a:t>
                 </a:r>
               </a:p>
               <a:p>
@@ -27060,7 +27048,22 @@
                 </a:pPr>
                 <a:r>
                   <a:rPr lang="pt-BR" dirty="0"/>
-                  <a:t>Vetor gradiente tende a zero.</a:t>
+                  <a:t>Se inclinação </a:t>
+                </a:r>
+                <a14:m>
+                  <m:oMath xmlns:m="http://schemas.openxmlformats.org/officeDocument/2006/math">
+                    <m:r>
+                      <a:rPr lang="pt-BR" i="1">
+                        <a:latin typeface="Cambria Math" panose="02040503050406030204" pitchFamily="18" charset="0"/>
+                        <a:ea typeface="Cambria Math" panose="02040503050406030204" pitchFamily="18" charset="0"/>
+                      </a:rPr>
+                      <m:t>≈0</m:t>
+                    </m:r>
+                  </m:oMath>
+                </a14:m>
+                <a:r>
+                  <a:rPr lang="pt-BR" dirty="0"/>
+                  <a:t>, o vetor gradiente tende a zero.</a:t>
                 </a:r>
                 <a:endParaRPr lang="pt-BR" b="0" i="0" dirty="0">
                   <a:solidFill>
@@ -27072,7 +27075,7 @@
             </p:txBody>
           </p:sp>
         </mc:Choice>
-        <mc:Fallback xmlns="">
+        <mc:Fallback>
           <p:sp>
             <p:nvSpPr>
               <p:cNvPr id="3" name="Espaço Reservado para Conteúdo 2">
@@ -27091,13 +27094,13 @@
             </p:nvSpPr>
             <p:spPr>
               <a:xfrm>
-                <a:off x="6760396" y="1825624"/>
-                <a:ext cx="5260367" cy="5032375"/>
+                <a:off x="6647952" y="1825624"/>
+                <a:ext cx="5465280" cy="5032375"/>
               </a:xfrm>
               <a:blipFill>
                 <a:blip r:embed="rId3"/>
                 <a:stretch>
-                  <a:fillRect l="-2086" t="-1937" r="-1043"/>
+                  <a:fillRect l="-2009" t="-1937" r="-1562"/>
                 </a:stretch>
               </a:blipFill>
             </p:spPr>
@@ -28776,7 +28779,27 @@
             </a:r>
             <a:r>
               <a:rPr lang="pt-BR" dirty="0"/>
-              <a:t>e não aos rótulos, pois são os atributos que influenciam o formato da superfície de erro.</a:t>
+              <a:t>e não aos rótulos, pois </a:t>
+            </a:r>
+            <a:r>
+              <a:rPr lang="pt-BR" b="1" i="1" dirty="0">
+                <a:solidFill>
+                  <a:schemeClr val="accent2"/>
+                </a:solidFill>
+              </a:rPr>
+              <a:t>são os atributos que influenciam o formato</a:t>
+            </a:r>
+            <a:r>
+              <a:rPr lang="pt-BR" i="1" dirty="0">
+                <a:solidFill>
+                  <a:schemeClr val="accent2"/>
+                </a:solidFill>
+              </a:rPr>
+              <a:t> da superfície </a:t>
+            </a:r>
+            <a:r>
+              <a:rPr lang="pt-BR" dirty="0"/>
+              <a:t>de erro.</a:t>
             </a:r>
           </a:p>
           <a:p>

--- a/slides/T319_Regressão_Linear (Parte IV).pptx
+++ b/slides/T319_Regressão_Linear (Parte IV).pptx
@@ -2,51 +2,51 @@
 <file path=ppt/presentation.xml><?xml version="1.0" encoding="utf-8"?>
 <p:presentation xmlns:a="http://schemas.openxmlformats.org/drawingml/2006/main" xmlns:r="http://schemas.openxmlformats.org/officeDocument/2006/relationships" xmlns:p="http://schemas.openxmlformats.org/presentationml/2006/main" saveSubsetFonts="1">
   <p:sldMasterIdLst>
-    <p:sldMasterId id="2147483648" r:id="rId1"/>
+    <p:sldMasterId id="2147483648" r:id="rId4"/>
   </p:sldMasterIdLst>
   <p:notesMasterIdLst>
-    <p:notesMasterId r:id="rId41"/>
+    <p:notesMasterId r:id="rId44"/>
   </p:notesMasterIdLst>
   <p:sldIdLst>
-    <p:sldId id="259" r:id="rId2"/>
-    <p:sldId id="486" r:id="rId3"/>
-    <p:sldId id="514" r:id="rId4"/>
-    <p:sldId id="516" r:id="rId5"/>
-    <p:sldId id="543" r:id="rId6"/>
-    <p:sldId id="519" r:id="rId7"/>
-    <p:sldId id="334" r:id="rId8"/>
-    <p:sldId id="544" r:id="rId9"/>
-    <p:sldId id="469" r:id="rId10"/>
-    <p:sldId id="520" r:id="rId11"/>
-    <p:sldId id="521" r:id="rId12"/>
-    <p:sldId id="523" r:id="rId13"/>
-    <p:sldId id="524" r:id="rId14"/>
-    <p:sldId id="542" r:id="rId15"/>
-    <p:sldId id="547" r:id="rId16"/>
-    <p:sldId id="525" r:id="rId17"/>
-    <p:sldId id="471" r:id="rId18"/>
-    <p:sldId id="550" r:id="rId19"/>
-    <p:sldId id="551" r:id="rId20"/>
-    <p:sldId id="552" r:id="rId21"/>
-    <p:sldId id="528" r:id="rId22"/>
-    <p:sldId id="529" r:id="rId23"/>
-    <p:sldId id="472" r:id="rId24"/>
-    <p:sldId id="545" r:id="rId25"/>
-    <p:sldId id="546" r:id="rId26"/>
-    <p:sldId id="534" r:id="rId27"/>
-    <p:sldId id="536" r:id="rId28"/>
-    <p:sldId id="535" r:id="rId29"/>
-    <p:sldId id="532" r:id="rId30"/>
-    <p:sldId id="533" r:id="rId31"/>
-    <p:sldId id="441" r:id="rId32"/>
-    <p:sldId id="317" r:id="rId33"/>
-    <p:sldId id="256" r:id="rId34"/>
-    <p:sldId id="538" r:id="rId35"/>
-    <p:sldId id="541" r:id="rId36"/>
-    <p:sldId id="539" r:id="rId37"/>
-    <p:sldId id="332" r:id="rId38"/>
-    <p:sldId id="522" r:id="rId39"/>
-    <p:sldId id="475" r:id="rId40"/>
+    <p:sldId id="259" r:id="rId5"/>
+    <p:sldId id="486" r:id="rId6"/>
+    <p:sldId id="514" r:id="rId7"/>
+    <p:sldId id="516" r:id="rId8"/>
+    <p:sldId id="543" r:id="rId9"/>
+    <p:sldId id="519" r:id="rId10"/>
+    <p:sldId id="334" r:id="rId11"/>
+    <p:sldId id="544" r:id="rId12"/>
+    <p:sldId id="469" r:id="rId13"/>
+    <p:sldId id="520" r:id="rId14"/>
+    <p:sldId id="521" r:id="rId15"/>
+    <p:sldId id="523" r:id="rId16"/>
+    <p:sldId id="524" r:id="rId17"/>
+    <p:sldId id="542" r:id="rId18"/>
+    <p:sldId id="547" r:id="rId19"/>
+    <p:sldId id="525" r:id="rId20"/>
+    <p:sldId id="471" r:id="rId21"/>
+    <p:sldId id="550" r:id="rId22"/>
+    <p:sldId id="551" r:id="rId23"/>
+    <p:sldId id="552" r:id="rId24"/>
+    <p:sldId id="528" r:id="rId25"/>
+    <p:sldId id="529" r:id="rId26"/>
+    <p:sldId id="472" r:id="rId27"/>
+    <p:sldId id="545" r:id="rId28"/>
+    <p:sldId id="546" r:id="rId29"/>
+    <p:sldId id="534" r:id="rId30"/>
+    <p:sldId id="536" r:id="rId31"/>
+    <p:sldId id="535" r:id="rId32"/>
+    <p:sldId id="532" r:id="rId33"/>
+    <p:sldId id="533" r:id="rId34"/>
+    <p:sldId id="441" r:id="rId35"/>
+    <p:sldId id="317" r:id="rId36"/>
+    <p:sldId id="256" r:id="rId37"/>
+    <p:sldId id="538" r:id="rId38"/>
+    <p:sldId id="541" r:id="rId39"/>
+    <p:sldId id="539" r:id="rId40"/>
+    <p:sldId id="332" r:id="rId41"/>
+    <p:sldId id="522" r:id="rId42"/>
+    <p:sldId id="475" r:id="rId43"/>
   </p:sldIdLst>
   <p:sldSz cx="12192000" cy="6858000"/>
   <p:notesSz cx="6858000" cy="9144000"/>
@@ -153,333 +153,6 @@
 </p:presentation>
 </file>
 
-<file path=ppt/revisionInfo.xml><?xml version="1.0" encoding="utf-8"?>
-<p1510:revInfo xmlns:a="http://schemas.openxmlformats.org/drawingml/2006/main" xmlns:r="http://schemas.openxmlformats.org/officeDocument/2006/relationships" xmlns:p1510="http://schemas.microsoft.com/office/powerpoint/2015/10/main">
-  <p1510:revLst>
-    <p1510:client id="{20CAF96C-3A3A-4667-836E-5D2043E55A0D}" v="89" dt="2020-02-17T16:29:36.671"/>
-    <p1510:client id="{328F8323-A8B4-4BB5-8B29-141FF986EA24}" v="11" dt="2020-04-06T19:56:50.842"/>
-    <p1510:client id="{58D05219-7C7B-4B91-A7AF-DC0AF21441D4}" v="8" dt="2020-03-15T18:19:04.037"/>
-    <p1510:client id="{62FC7D01-7DC2-4ECC-8EE4-941CF425DBEE}" v="272" dt="2020-04-04T01:47:57.654"/>
-    <p1510:client id="{7B93843C-DFF4-4B6D-9934-AB8C4C568E2D}" v="86" dt="2020-03-14T00:29:41.866"/>
-    <p1510:client id="{B7CA8C48-7DAD-40D1-BA98-01463637147D}" v="67" dt="2020-03-14T21:04:21.668"/>
-    <p1510:client id="{BAE3137E-5ED2-488F-90AA-67C3B75162E2}" v="4" dt="2020-04-06T18:41:56.776"/>
-  </p1510:revLst>
-</p1510:revInfo>
-</file>
-
-<file path=ppt/changesInfos/changesInfo1.xml><?xml version="1.0" encoding="utf-8"?>
-<pc:chgInfo xmlns:a="http://schemas.openxmlformats.org/drawingml/2006/main" xmlns:r="http://schemas.openxmlformats.org/officeDocument/2006/relationships" xmlns:ac="http://schemas.microsoft.com/office/drawing/2013/main/command" xmlns:pc="http://schemas.microsoft.com/office/powerpoint/2013/main/command">
-  <pc:docChgLst>
-    <pc:chgData name="Felipe Augusto Pereira de Figueiredo" userId="e1771b70d906f94b" providerId="Windows Live" clId="Web-{B7CA8C48-7DAD-40D1-BA98-01463637147D}"/>
-    <pc:docChg chg="modSld">
-      <pc:chgData name="Felipe Augusto Pereira de Figueiredo" userId="e1771b70d906f94b" providerId="Windows Live" clId="Web-{B7CA8C48-7DAD-40D1-BA98-01463637147D}" dt="2020-03-14T21:04:21.668" v="66" actId="20577"/>
-      <pc:docMkLst>
-        <pc:docMk/>
-      </pc:docMkLst>
-      <pc:sldChg chg="modSp">
-        <pc:chgData name="Felipe Augusto Pereira de Figueiredo" userId="e1771b70d906f94b" providerId="Windows Live" clId="Web-{B7CA8C48-7DAD-40D1-BA98-01463637147D}" dt="2020-03-14T21:04:21.668" v="65" actId="20577"/>
-        <pc:sldMkLst>
-          <pc:docMk/>
-          <pc:sldMk cId="63867976" sldId="310"/>
-        </pc:sldMkLst>
-        <pc:spChg chg="mod">
-          <ac:chgData name="Felipe Augusto Pereira de Figueiredo" userId="e1771b70d906f94b" providerId="Windows Live" clId="Web-{B7CA8C48-7DAD-40D1-BA98-01463637147D}" dt="2020-03-14T21:04:21.668" v="65" actId="20577"/>
-          <ac:spMkLst>
-            <pc:docMk/>
-            <pc:sldMk cId="63867976" sldId="310"/>
-            <ac:spMk id="3" creationId="{00000000-0000-0000-0000-000000000000}"/>
-          </ac:spMkLst>
-        </pc:spChg>
-      </pc:sldChg>
-    </pc:docChg>
-  </pc:docChgLst>
-  <pc:docChgLst>
-    <pc:chgData name="Felipe Augusto Pereira de Figueiredo" userId="e1771b70d906f94b" providerId="Windows Live" clId="Web-{BAE3137E-5ED2-488F-90AA-67C3B75162E2}"/>
-    <pc:docChg chg="delSld">
-      <pc:chgData name="Felipe Augusto Pereira de Figueiredo" userId="e1771b70d906f94b" providerId="Windows Live" clId="Web-{BAE3137E-5ED2-488F-90AA-67C3B75162E2}" dt="2020-04-06T18:41:56.776" v="3"/>
-      <pc:docMkLst>
-        <pc:docMk/>
-      </pc:docMkLst>
-      <pc:sldChg chg="del">
-        <pc:chgData name="Felipe Augusto Pereira de Figueiredo" userId="e1771b70d906f94b" providerId="Windows Live" clId="Web-{BAE3137E-5ED2-488F-90AA-67C3B75162E2}" dt="2020-04-06T18:41:36.120" v="0"/>
-        <pc:sldMkLst>
-          <pc:docMk/>
-          <pc:sldMk cId="2987778591" sldId="361"/>
-        </pc:sldMkLst>
-      </pc:sldChg>
-      <pc:sldChg chg="del">
-        <pc:chgData name="Felipe Augusto Pereira de Figueiredo" userId="e1771b70d906f94b" providerId="Windows Live" clId="Web-{BAE3137E-5ED2-488F-90AA-67C3B75162E2}" dt="2020-04-06T18:41:56.698" v="2"/>
-        <pc:sldMkLst>
-          <pc:docMk/>
-          <pc:sldMk cId="1383714521" sldId="385"/>
-        </pc:sldMkLst>
-      </pc:sldChg>
-      <pc:sldChg chg="del">
-        <pc:chgData name="Felipe Augusto Pereira de Figueiredo" userId="e1771b70d906f94b" providerId="Windows Live" clId="Web-{BAE3137E-5ED2-488F-90AA-67C3B75162E2}" dt="2020-04-06T18:41:56.776" v="3"/>
-        <pc:sldMkLst>
-          <pc:docMk/>
-          <pc:sldMk cId="1326828379" sldId="386"/>
-        </pc:sldMkLst>
-      </pc:sldChg>
-      <pc:sldChg chg="del">
-        <pc:chgData name="Felipe Augusto Pereira de Figueiredo" userId="e1771b70d906f94b" providerId="Windows Live" clId="Web-{BAE3137E-5ED2-488F-90AA-67C3B75162E2}" dt="2020-04-06T18:41:48.901" v="1"/>
-        <pc:sldMkLst>
-          <pc:docMk/>
-          <pc:sldMk cId="2260281898" sldId="387"/>
-        </pc:sldMkLst>
-      </pc:sldChg>
-    </pc:docChg>
-  </pc:docChgLst>
-  <pc:docChgLst>
-    <pc:chgData name="Felipe Augusto Pereira de Figueiredo" userId="e1771b70d906f94b" providerId="Windows Live" clId="Web-{20CAF96C-3A3A-4667-836E-5D2043E55A0D}"/>
-    <pc:docChg chg="addSld modSld">
-      <pc:chgData name="Felipe Augusto Pereira de Figueiredo" userId="e1771b70d906f94b" providerId="Windows Live" clId="Web-{20CAF96C-3A3A-4667-836E-5D2043E55A0D}" dt="2020-02-17T16:29:36.671" v="85"/>
-      <pc:docMkLst>
-        <pc:docMk/>
-      </pc:docMkLst>
-      <pc:sldChg chg="delSp modSp">
-        <pc:chgData name="Felipe Augusto Pereira de Figueiredo" userId="e1771b70d906f94b" providerId="Windows Live" clId="Web-{20CAF96C-3A3A-4667-836E-5D2043E55A0D}" dt="2020-02-17T16:28:56.981" v="84"/>
-        <pc:sldMkLst>
-          <pc:docMk/>
-          <pc:sldMk cId="2105159769" sldId="256"/>
-        </pc:sldMkLst>
-        <pc:spChg chg="mod">
-          <ac:chgData name="Felipe Augusto Pereira de Figueiredo" userId="e1771b70d906f94b" providerId="Windows Live" clId="Web-{20CAF96C-3A3A-4667-836E-5D2043E55A0D}" dt="2020-02-17T16:28:51.715" v="81" actId="20577"/>
-          <ac:spMkLst>
-            <pc:docMk/>
-            <pc:sldMk cId="2105159769" sldId="256"/>
-            <ac:spMk id="2" creationId="{00000000-0000-0000-0000-000000000000}"/>
-          </ac:spMkLst>
-        </pc:spChg>
-        <pc:spChg chg="del mod">
-          <ac:chgData name="Felipe Augusto Pereira de Figueiredo" userId="e1771b70d906f94b" providerId="Windows Live" clId="Web-{20CAF96C-3A3A-4667-836E-5D2043E55A0D}" dt="2020-02-17T16:28:56.981" v="84"/>
-          <ac:spMkLst>
-            <pc:docMk/>
-            <pc:sldMk cId="2105159769" sldId="256"/>
-            <ac:spMk id="3" creationId="{00000000-0000-0000-0000-000000000000}"/>
-          </ac:spMkLst>
-        </pc:spChg>
-      </pc:sldChg>
-      <pc:sldChg chg="new">
-        <pc:chgData name="Felipe Augusto Pereira de Figueiredo" userId="e1771b70d906f94b" providerId="Windows Live" clId="Web-{20CAF96C-3A3A-4667-836E-5D2043E55A0D}" dt="2020-02-17T16:29:36.671" v="85"/>
-        <pc:sldMkLst>
-          <pc:docMk/>
-          <pc:sldMk cId="2437199265" sldId="257"/>
-        </pc:sldMkLst>
-      </pc:sldChg>
-    </pc:docChg>
-  </pc:docChgLst>
-  <pc:docChgLst>
-    <pc:chgData name="Felipe Augusto Pereira de Figueiredo" userId="e1771b70d906f94b" providerId="Windows Live" clId="Web-{08E38356-0DC9-4DD7-A6CF-E66A8B5B2F0A}"/>
-    <pc:docChg chg="modSld">
-      <pc:chgData name="Felipe Augusto Pereira de Figueiredo" userId="e1771b70d906f94b" providerId="Windows Live" clId="Web-{08E38356-0DC9-4DD7-A6CF-E66A8B5B2F0A}" dt="2020-03-18T17:39:02.661" v="87"/>
-      <pc:docMkLst>
-        <pc:docMk/>
-      </pc:docMkLst>
-      <pc:sldChg chg="modNotes">
-        <pc:chgData name="Felipe Augusto Pereira de Figueiredo" userId="e1771b70d906f94b" providerId="Windows Live" clId="Web-{08E38356-0DC9-4DD7-A6CF-E66A8B5B2F0A}" dt="2020-03-18T17:39:02.661" v="87"/>
-        <pc:sldMkLst>
-          <pc:docMk/>
-          <pc:sldMk cId="1706263506" sldId="312"/>
-        </pc:sldMkLst>
-      </pc:sldChg>
-    </pc:docChg>
-  </pc:docChgLst>
-  <pc:docChgLst>
-    <pc:chgData name="Felipe Augusto Pereira de Figueiredo" userId="e1771b70d906f94b" providerId="Windows Live" clId="Web-{7B93843C-DFF4-4B6D-9934-AB8C4C568E2D}"/>
-    <pc:docChg chg="modSld">
-      <pc:chgData name="Felipe Augusto Pereira de Figueiredo" userId="e1771b70d906f94b" providerId="Windows Live" clId="Web-{7B93843C-DFF4-4B6D-9934-AB8C4C568E2D}" dt="2020-03-14T00:29:41.866" v="84" actId="20577"/>
-      <pc:docMkLst>
-        <pc:docMk/>
-      </pc:docMkLst>
-      <pc:sldChg chg="modSp">
-        <pc:chgData name="Felipe Augusto Pereira de Figueiredo" userId="e1771b70d906f94b" providerId="Windows Live" clId="Web-{7B93843C-DFF4-4B6D-9934-AB8C4C568E2D}" dt="2020-03-14T00:29:41.866" v="83" actId="20577"/>
-        <pc:sldMkLst>
-          <pc:docMk/>
-          <pc:sldMk cId="63867976" sldId="310"/>
-        </pc:sldMkLst>
-        <pc:spChg chg="mod">
-          <ac:chgData name="Felipe Augusto Pereira de Figueiredo" userId="e1771b70d906f94b" providerId="Windows Live" clId="Web-{7B93843C-DFF4-4B6D-9934-AB8C4C568E2D}" dt="2020-03-14T00:29:41.866" v="83" actId="20577"/>
-          <ac:spMkLst>
-            <pc:docMk/>
-            <pc:sldMk cId="63867976" sldId="310"/>
-            <ac:spMk id="2" creationId="{00000000-0000-0000-0000-000000000000}"/>
-          </ac:spMkLst>
-        </pc:spChg>
-        <pc:spChg chg="mod">
-          <ac:chgData name="Felipe Augusto Pereira de Figueiredo" userId="e1771b70d906f94b" providerId="Windows Live" clId="Web-{7B93843C-DFF4-4B6D-9934-AB8C4C568E2D}" dt="2020-03-14T00:29:05.036" v="71" actId="20577"/>
-          <ac:spMkLst>
-            <pc:docMk/>
-            <pc:sldMk cId="63867976" sldId="310"/>
-            <ac:spMk id="3" creationId="{00000000-0000-0000-0000-000000000000}"/>
-          </ac:spMkLst>
-        </pc:spChg>
-      </pc:sldChg>
-    </pc:docChg>
-  </pc:docChgLst>
-  <pc:docChgLst>
-    <pc:chgData name="Felipe Augusto Pereira de Figueiredo" userId="e1771b70d906f94b" providerId="Windows Live" clId="Web-{62FC7D01-7DC2-4ECC-8EE4-941CF425DBEE}"/>
-    <pc:docChg chg="addSld delSld modSld">
-      <pc:chgData name="Felipe Augusto Pereira de Figueiredo" userId="e1771b70d906f94b" providerId="Windows Live" clId="Web-{62FC7D01-7DC2-4ECC-8EE4-941CF425DBEE}" dt="2020-04-04T01:47:57.654" v="273" actId="1076"/>
-      <pc:docMkLst>
-        <pc:docMk/>
-      </pc:docMkLst>
-      <pc:sldChg chg="del">
-        <pc:chgData name="Felipe Augusto Pereira de Figueiredo" userId="e1771b70d906f94b" providerId="Windows Live" clId="Web-{62FC7D01-7DC2-4ECC-8EE4-941CF425DBEE}" dt="2020-04-04T01:13:21.236" v="1"/>
-        <pc:sldMkLst>
-          <pc:docMk/>
-          <pc:sldMk cId="883606865" sldId="300"/>
-        </pc:sldMkLst>
-      </pc:sldChg>
-      <pc:sldChg chg="addSp modSp">
-        <pc:chgData name="Felipe Augusto Pereira de Figueiredo" userId="e1771b70d906f94b" providerId="Windows Live" clId="Web-{62FC7D01-7DC2-4ECC-8EE4-941CF425DBEE}" dt="2020-04-04T01:47:57.654" v="273" actId="1076"/>
-        <pc:sldMkLst>
-          <pc:docMk/>
-          <pc:sldMk cId="1037579582" sldId="332"/>
-        </pc:sldMkLst>
-        <pc:picChg chg="add mod">
-          <ac:chgData name="Felipe Augusto Pereira de Figueiredo" userId="e1771b70d906f94b" providerId="Windows Live" clId="Web-{62FC7D01-7DC2-4ECC-8EE4-941CF425DBEE}" dt="2020-04-04T01:47:57.654" v="273" actId="1076"/>
-          <ac:picMkLst>
-            <pc:docMk/>
-            <pc:sldMk cId="1037579582" sldId="332"/>
-            <ac:picMk id="3" creationId="{2A0DF154-7178-4F01-A59C-CD7D1EB3AD92}"/>
-          </ac:picMkLst>
-        </pc:picChg>
-      </pc:sldChg>
-      <pc:sldChg chg="modSp">
-        <pc:chgData name="Felipe Augusto Pereira de Figueiredo" userId="e1771b70d906f94b" providerId="Windows Live" clId="Web-{62FC7D01-7DC2-4ECC-8EE4-941CF425DBEE}" dt="2020-04-04T01:25:24.877" v="195" actId="20577"/>
-        <pc:sldMkLst>
-          <pc:docMk/>
-          <pc:sldMk cId="2987778591" sldId="361"/>
-        </pc:sldMkLst>
-        <pc:spChg chg="mod">
-          <ac:chgData name="Felipe Augusto Pereira de Figueiredo" userId="e1771b70d906f94b" providerId="Windows Live" clId="Web-{62FC7D01-7DC2-4ECC-8EE4-941CF425DBEE}" dt="2020-04-04T01:25:24.877" v="195" actId="20577"/>
-          <ac:spMkLst>
-            <pc:docMk/>
-            <pc:sldMk cId="2987778591" sldId="361"/>
-            <ac:spMk id="3" creationId="{00000000-0000-0000-0000-000000000000}"/>
-          </ac:spMkLst>
-        </pc:spChg>
-      </pc:sldChg>
-      <pc:sldChg chg="modSp modNotes">
-        <pc:chgData name="Felipe Augusto Pereira de Figueiredo" userId="e1771b70d906f94b" providerId="Windows Live" clId="Web-{62FC7D01-7DC2-4ECC-8EE4-941CF425DBEE}" dt="2020-04-04T01:22:38.663" v="142" actId="14100"/>
-        <pc:sldMkLst>
-          <pc:docMk/>
-          <pc:sldMk cId="3813385247" sldId="378"/>
-        </pc:sldMkLst>
-        <pc:spChg chg="mod">
-          <ac:chgData name="Felipe Augusto Pereira de Figueiredo" userId="e1771b70d906f94b" providerId="Windows Live" clId="Web-{62FC7D01-7DC2-4ECC-8EE4-941CF425DBEE}" dt="2020-04-04T01:22:38.663" v="142" actId="14100"/>
-          <ac:spMkLst>
-            <pc:docMk/>
-            <pc:sldMk cId="3813385247" sldId="378"/>
-            <ac:spMk id="3" creationId="{00000000-0000-0000-0000-000000000000}"/>
-          </ac:spMkLst>
-        </pc:spChg>
-      </pc:sldChg>
-      <pc:sldChg chg="del">
-        <pc:chgData name="Felipe Augusto Pereira de Figueiredo" userId="e1771b70d906f94b" providerId="Windows Live" clId="Web-{62FC7D01-7DC2-4ECC-8EE4-941CF425DBEE}" dt="2020-04-04T01:24:50.391" v="175"/>
-        <pc:sldMkLst>
-          <pc:docMk/>
-          <pc:sldMk cId="2636909579" sldId="379"/>
-        </pc:sldMkLst>
-      </pc:sldChg>
-      <pc:sldChg chg="del">
-        <pc:chgData name="Felipe Augusto Pereira de Figueiredo" userId="e1771b70d906f94b" providerId="Windows Live" clId="Web-{62FC7D01-7DC2-4ECC-8EE4-941CF425DBEE}" dt="2020-04-04T01:24:50.406" v="176"/>
-        <pc:sldMkLst>
-          <pc:docMk/>
-          <pc:sldMk cId="3307251767" sldId="380"/>
-        </pc:sldMkLst>
-      </pc:sldChg>
-      <pc:sldChg chg="del">
-        <pc:chgData name="Felipe Augusto Pereira de Figueiredo" userId="e1771b70d906f94b" providerId="Windows Live" clId="Web-{62FC7D01-7DC2-4ECC-8EE4-941CF425DBEE}" dt="2020-04-04T01:28:01.669" v="197"/>
-        <pc:sldMkLst>
-          <pc:docMk/>
-          <pc:sldMk cId="1498450978" sldId="381"/>
-        </pc:sldMkLst>
-      </pc:sldChg>
-      <pc:sldChg chg="add replId">
-        <pc:chgData name="Felipe Augusto Pereira de Figueiredo" userId="e1771b70d906f94b" providerId="Windows Live" clId="Web-{62FC7D01-7DC2-4ECC-8EE4-941CF425DBEE}" dt="2020-04-04T01:13:12.219" v="0"/>
-        <pc:sldMkLst>
-          <pc:docMk/>
-          <pc:sldMk cId="1168747188" sldId="398"/>
-        </pc:sldMkLst>
-      </pc:sldChg>
-      <pc:sldChg chg="modSp new modNotes">
-        <pc:chgData name="Felipe Augusto Pereira de Figueiredo" userId="e1771b70d906f94b" providerId="Windows Live" clId="Web-{62FC7D01-7DC2-4ECC-8EE4-941CF425DBEE}" dt="2020-04-04T01:33:54.380" v="268" actId="20577"/>
-        <pc:sldMkLst>
-          <pc:docMk/>
-          <pc:sldMk cId="2414479644" sldId="399"/>
-        </pc:sldMkLst>
-        <pc:spChg chg="mod">
-          <ac:chgData name="Felipe Augusto Pereira de Figueiredo" userId="e1771b70d906f94b" providerId="Windows Live" clId="Web-{62FC7D01-7DC2-4ECC-8EE4-941CF425DBEE}" dt="2020-04-04T01:19:47.214" v="68" actId="20577"/>
-          <ac:spMkLst>
-            <pc:docMk/>
-            <pc:sldMk cId="2414479644" sldId="399"/>
-            <ac:spMk id="2" creationId="{F4227E34-0D58-4F7C-A44C-874904CC31AB}"/>
-          </ac:spMkLst>
-        </pc:spChg>
-        <pc:spChg chg="mod">
-          <ac:chgData name="Felipe Augusto Pereira de Figueiredo" userId="e1771b70d906f94b" providerId="Windows Live" clId="Web-{62FC7D01-7DC2-4ECC-8EE4-941CF425DBEE}" dt="2020-04-04T01:33:54.380" v="268" actId="20577"/>
-          <ac:spMkLst>
-            <pc:docMk/>
-            <pc:sldMk cId="2414479644" sldId="399"/>
-            <ac:spMk id="3" creationId="{96005A71-5862-4C74-B1AF-2AAB990B557F}"/>
-          </ac:spMkLst>
-        </pc:spChg>
-      </pc:sldChg>
-    </pc:docChg>
-  </pc:docChgLst>
-  <pc:docChgLst>
-    <pc:chgData name="Felipe Augusto Pereira de Figueiredo" userId="e1771b70d906f94b" providerId="Windows Live" clId="Web-{58D05219-7C7B-4B91-A7AF-DC0AF21441D4}"/>
-    <pc:docChg chg="modSld">
-      <pc:chgData name="Felipe Augusto Pereira de Figueiredo" userId="e1771b70d906f94b" providerId="Windows Live" clId="Web-{58D05219-7C7B-4B91-A7AF-DC0AF21441D4}" dt="2020-03-15T18:19:02.459" v="6" actId="20577"/>
-      <pc:docMkLst>
-        <pc:docMk/>
-      </pc:docMkLst>
-      <pc:sldChg chg="modSp">
-        <pc:chgData name="Felipe Augusto Pereira de Figueiredo" userId="e1771b70d906f94b" providerId="Windows Live" clId="Web-{58D05219-7C7B-4B91-A7AF-DC0AF21441D4}" dt="2020-03-15T18:18:57.443" v="4" actId="20577"/>
-        <pc:sldMkLst>
-          <pc:docMk/>
-          <pc:sldMk cId="63867976" sldId="310"/>
-        </pc:sldMkLst>
-        <pc:spChg chg="mod">
-          <ac:chgData name="Felipe Augusto Pereira de Figueiredo" userId="e1771b70d906f94b" providerId="Windows Live" clId="Web-{58D05219-7C7B-4B91-A7AF-DC0AF21441D4}" dt="2020-03-15T18:18:57.443" v="4" actId="20577"/>
-          <ac:spMkLst>
-            <pc:docMk/>
-            <pc:sldMk cId="63867976" sldId="310"/>
-            <ac:spMk id="3" creationId="{00000000-0000-0000-0000-000000000000}"/>
-          </ac:spMkLst>
-        </pc:spChg>
-      </pc:sldChg>
-    </pc:docChg>
-  </pc:docChgLst>
-  <pc:docChgLst>
-    <pc:chgData name="Felipe Augusto Pereira de Figueiredo" userId="e1771b70d906f94b" providerId="Windows Live" clId="Web-{328F8323-A8B4-4BB5-8B29-141FF986EA24}"/>
-    <pc:docChg chg="modSld">
-      <pc:chgData name="Felipe Augusto Pereira de Figueiredo" userId="e1771b70d906f94b" providerId="Windows Live" clId="Web-{328F8323-A8B4-4BB5-8B29-141FF986EA24}" dt="2020-04-06T19:56:50.780" v="9" actId="20577"/>
-      <pc:docMkLst>
-        <pc:docMk/>
-      </pc:docMkLst>
-      <pc:sldChg chg="modSp">
-        <pc:chgData name="Felipe Augusto Pereira de Figueiredo" userId="e1771b70d906f94b" providerId="Windows Live" clId="Web-{328F8323-A8B4-4BB5-8B29-141FF986EA24}" dt="2020-04-06T19:56:50.780" v="8" actId="20577"/>
-        <pc:sldMkLst>
-          <pc:docMk/>
-          <pc:sldMk cId="4289465553" sldId="388"/>
-        </pc:sldMkLst>
-        <pc:spChg chg="mod">
-          <ac:chgData name="Felipe Augusto Pereira de Figueiredo" userId="e1771b70d906f94b" providerId="Windows Live" clId="Web-{328F8323-A8B4-4BB5-8B29-141FF986EA24}" dt="2020-04-06T19:56:50.780" v="8" actId="20577"/>
-          <ac:spMkLst>
-            <pc:docMk/>
-            <pc:sldMk cId="4289465553" sldId="388"/>
-            <ac:spMk id="3" creationId="{00000000-0000-0000-0000-000000000000}"/>
-          </ac:spMkLst>
-        </pc:spChg>
-      </pc:sldChg>
-    </pc:docChg>
-  </pc:docChgLst>
-</pc:chgInfo>
-</file>
-
 <file path=ppt/notesMasters/notesMaster1.xml><?xml version="1.0" encoding="utf-8"?>
 <p:notesMaster xmlns:a="http://schemas.openxmlformats.org/drawingml/2006/main" xmlns:r="http://schemas.openxmlformats.org/officeDocument/2006/relationships" xmlns:p="http://schemas.openxmlformats.org/presentationml/2006/main">
   <p:cSld>
@@ -562,7 +235,7 @@
           <a:p>
             <a:fld id="{DAF0AF11-6A8A-4E64-94F5-26D4FBA2A01D}" type="datetimeFigureOut">
               <a:rPr lang="nl-BE" smtClean="0"/>
-              <a:t>24/04/2026</a:t>
+              <a:t>8/05/2026</a:t>
             </a:fld>
             <a:endParaRPr lang="nl-BE"/>
           </a:p>
@@ -721,7 +394,7 @@
           <a:p>
             <a:fld id="{DA8B99DF-01BC-492A-8CEF-4FD88D18DD9D}" type="slidenum">
               <a:rPr lang="nl-BE" smtClean="0"/>
-              <a:t>‹#›</a:t>
+              <a:t>‹nº›</a:t>
             </a:fld>
             <a:endParaRPr lang="nl-BE"/>
           </a:p>
@@ -2089,7 +1762,23 @@
           <a:bodyPr/>
           <a:lstStyle/>
           <a:p>
-            <a:endParaRPr lang="pt-BR" dirty="0"/>
+            <a:r>
+              <a:rPr lang="pt-BR" dirty="0"/>
+              <a:t>são </a:t>
+            </a:r>
+            <a:r>
+              <a:rPr lang="pt-BR" b="1" i="1" dirty="0">
+                <a:solidFill>
+                  <a:srgbClr val="0070C0"/>
+                </a:solidFill>
+              </a:rPr>
+              <a:t>compostos pelos atributos originais e pelos atributos formados através de suas combinações</a:t>
+            </a:r>
+            <a:r>
+              <a:rPr lang="pt-BR" dirty="0"/>
+              <a:t>.</a:t>
+            </a:r>
+            <a:endParaRPr lang="en-US" dirty="0"/>
           </a:p>
         </p:txBody>
       </p:sp>
@@ -2110,7 +1799,7 @@
           <a:p>
             <a:fld id="{DA8B99DF-01BC-492A-8CEF-4FD88D18DD9D}" type="slidenum">
               <a:rPr lang="nl-BE" smtClean="0"/>
-              <a:t>23</a:t>
+              <a:t>21</a:t>
             </a:fld>
             <a:endParaRPr lang="nl-BE"/>
           </a:p>
@@ -2119,7 +1808,7 @@
     </p:spTree>
     <p:extLst>
       <p:ext uri="{BB962C8B-B14F-4D97-AF65-F5344CB8AC3E}">
-        <p14:creationId xmlns:p14="http://schemas.microsoft.com/office/powerpoint/2010/main" val="1275039211"/>
+        <p14:creationId xmlns:p14="http://schemas.microsoft.com/office/powerpoint/2010/main" val="2789088577"/>
       </p:ext>
     </p:extLst>
   </p:cSld>
@@ -2194,7 +1883,7 @@
           <a:p>
             <a:fld id="{DA8B99DF-01BC-492A-8CEF-4FD88D18DD9D}" type="slidenum">
               <a:rPr lang="nl-BE" smtClean="0"/>
-              <a:t>24</a:t>
+              <a:t>23</a:t>
             </a:fld>
             <a:endParaRPr lang="nl-BE"/>
           </a:p>
@@ -2203,7 +1892,7 @@
     </p:spTree>
     <p:extLst>
       <p:ext uri="{BB962C8B-B14F-4D97-AF65-F5344CB8AC3E}">
-        <p14:creationId xmlns:p14="http://schemas.microsoft.com/office/powerpoint/2010/main" val="3386977099"/>
+        <p14:creationId xmlns:p14="http://schemas.microsoft.com/office/powerpoint/2010/main" val="1275039211"/>
       </p:ext>
     </p:extLst>
   </p:cSld>
@@ -2278,7 +1967,7 @@
           <a:p>
             <a:fld id="{DA8B99DF-01BC-492A-8CEF-4FD88D18DD9D}" type="slidenum">
               <a:rPr lang="nl-BE" smtClean="0"/>
-              <a:t>25</a:t>
+              <a:t>24</a:t>
             </a:fld>
             <a:endParaRPr lang="nl-BE"/>
           </a:p>
@@ -2287,7 +1976,7 @@
     </p:spTree>
     <p:extLst>
       <p:ext uri="{BB962C8B-B14F-4D97-AF65-F5344CB8AC3E}">
-        <p14:creationId xmlns:p14="http://schemas.microsoft.com/office/powerpoint/2010/main" val="4193974574"/>
+        <p14:creationId xmlns:p14="http://schemas.microsoft.com/office/powerpoint/2010/main" val="3386977099"/>
       </p:ext>
     </p:extLst>
   </p:cSld>
@@ -2341,93 +2030,6 @@
           <a:bodyPr/>
           <a:lstStyle/>
           <a:p>
-            <a:pPr marL="0" marR="0" lvl="0" indent="0" algn="l" defTabSz="914400" rtl="0" eaLnBrk="1" fontAlgn="auto" latinLnBrk="0" hangingPunct="1">
-              <a:lnSpc>
-                <a:spcPct val="100000"/>
-              </a:lnSpc>
-              <a:spcBef>
-                <a:spcPts val="0"/>
-              </a:spcBef>
-              <a:spcAft>
-                <a:spcPts val="0"/>
-              </a:spcAft>
-              <a:buClrTx/>
-              <a:buSzTx/>
-              <a:buFontTx/>
-              <a:buNone/>
-              <a:tabLst/>
-              <a:defRPr/>
-            </a:pPr>
-            <a:r>
-              <a:rPr lang="pt-BR" b="1" noProof="0" dirty="0"/>
-              <a:t>Exemplo</a:t>
-            </a:r>
-            <a:r>
-              <a:rPr lang="pt-BR" noProof="0" dirty="0"/>
-              <a:t>: </a:t>
-            </a:r>
-            <a:r>
-              <a:rPr lang="pt-BR" dirty="0"/>
-              <a:t>https://mybinder.org/v2/gh/zz4fap/t319_aprendizado_de_maquina/main?filepath=notebooks%2Fregression%2Fpolynomial_regression.ipynb</a:t>
-            </a:r>
-            <a:endParaRPr lang="pt-BR" u="none" dirty="0"/>
-          </a:p>
-          <a:p>
-            <a:endParaRPr lang="pt-BR" dirty="0"/>
-          </a:p>
-          <a:p>
-            <a:r>
-              <a:rPr lang="pt-BR" dirty="0"/>
-              <a:t>O modelo com polinômio de grau 1 não captura a curvatura dos pontos de treinamento. Ele erra muito tanto para exemplos de treinamento quanto para exemplos não vistos durante o treinamento (validação). </a:t>
-            </a:r>
-          </a:p>
-          <a:p>
-            <a:r>
-              <a:rPr lang="pt-BR" dirty="0"/>
-              <a:t>O modelo com polinômio de grau 30 acerta a predição de todos os exemplos de treinamento, mas erraria muito para exemplos não vistos durante treinamento. </a:t>
-            </a:r>
-          </a:p>
-          <a:p>
-            <a:pPr lvl="1"/>
-            <a:r>
-              <a:rPr lang="pt-BR" b="1" dirty="0"/>
-              <a:t>A flexibilidade do modelo é tão alta que ele aprende também o ruído presente no conjunto de treinamento.</a:t>
-            </a:r>
-          </a:p>
-          <a:p>
-            <a:r>
-              <a:rPr lang="pt-BR" dirty="0"/>
-              <a:t>O modelo com polinômio de grau 2 se ajusta bem aos exemplos, mas sem acertá-los perfeitamente. Este é provavelmente o modelo ótimo em termos da </a:t>
-            </a:r>
-            <a:r>
-              <a:rPr lang="pt-BR" b="1" i="1" dirty="0"/>
-              <a:t>relação de compromisso</a:t>
-            </a:r>
-            <a:r>
-              <a:rPr lang="pt-BR" dirty="0"/>
-              <a:t> entre os erros de </a:t>
-            </a:r>
-            <a:r>
-              <a:rPr lang="pt-BR" b="1" dirty="0"/>
-              <a:t>flexibilidade </a:t>
-            </a:r>
-            <a:r>
-              <a:rPr lang="pt-BR" dirty="0"/>
-              <a:t>e de </a:t>
-            </a:r>
-            <a:r>
-              <a:rPr lang="pt-BR" b="1" dirty="0"/>
-              <a:t>generalização</a:t>
-            </a:r>
-            <a:r>
-              <a:rPr lang="pt-BR" dirty="0"/>
-              <a:t>.</a:t>
-            </a:r>
-          </a:p>
-          <a:p>
-            <a:endParaRPr lang="pt-BR" dirty="0"/>
-          </a:p>
-          <a:p>
             <a:endParaRPr lang="pt-BR" dirty="0"/>
           </a:p>
         </p:txBody>
@@ -2449,7 +2051,7 @@
           <a:p>
             <a:fld id="{DA8B99DF-01BC-492A-8CEF-4FD88D18DD9D}" type="slidenum">
               <a:rPr lang="nl-BE" smtClean="0"/>
-              <a:t>26</a:t>
+              <a:t>25</a:t>
             </a:fld>
             <a:endParaRPr lang="nl-BE"/>
           </a:p>
@@ -2458,7 +2060,7 @@
     </p:spTree>
     <p:extLst>
       <p:ext uri="{BB962C8B-B14F-4D97-AF65-F5344CB8AC3E}">
-        <p14:creationId xmlns:p14="http://schemas.microsoft.com/office/powerpoint/2010/main" val="430199544"/>
+        <p14:creationId xmlns:p14="http://schemas.microsoft.com/office/powerpoint/2010/main" val="4193974574"/>
       </p:ext>
     </p:extLst>
   </p:cSld>
@@ -2512,15 +2114,6 @@
           <a:bodyPr/>
           <a:lstStyle/>
           <a:p>
-            <a:r>
-              <a:rPr lang="pt-BR" dirty="0"/>
-              <a:t>Binder: https://mybinder.org/v2/gh/zz4fap/t319_aprendizado_de_maquina/main?filepath=notebooks/regression/polynomial_regression.ipynb</a:t>
-            </a:r>
-          </a:p>
-          <a:p>
-            <a:endParaRPr lang="pt-BR" dirty="0"/>
-          </a:p>
-          <a:p>
             <a:pPr marL="0" marR="0" lvl="0" indent="0" algn="l" defTabSz="914400" rtl="0" eaLnBrk="1" fontAlgn="auto" latinLnBrk="0" hangingPunct="1">
               <a:lnSpc>
                 <a:spcPct val="100000"/>
@@ -2539,13 +2132,18 @@
               <a:defRPr/>
             </a:pPr>
             <a:r>
-              <a:rPr lang="pt-BR" dirty="0" err="1"/>
-              <a:t>Colab</a:t>
+              <a:rPr lang="pt-BR" b="1" noProof="0" dirty="0"/>
+              <a:t>Exemplo</a:t>
+            </a:r>
+            <a:r>
+              <a:rPr lang="pt-BR" noProof="0" dirty="0"/>
+              <a:t>: </a:t>
             </a:r>
             <a:r>
               <a:rPr lang="pt-BR" dirty="0"/>
-              <a:t>: https://colab.research.google.com/github/zz4fap/t319_aprendizado_de_maquina/blob/main/notebooks/regression/polynomial_regression.ipynb</a:t>
-            </a:r>
+              <a:t>https://mybinder.org/v2/gh/zz4fap/t319_aprendizado_de_maquina/main?filepath=notebooks%2Fregression%2Fpolynomial_regression.ipynb</a:t>
+            </a:r>
+            <a:endParaRPr lang="pt-BR" u="none" dirty="0"/>
           </a:p>
           <a:p>
             <a:endParaRPr lang="pt-BR" dirty="0"/>
@@ -2553,683 +2151,54 @@
           <a:p>
             <a:r>
               <a:rPr lang="pt-BR" dirty="0"/>
-              <a:t>É importante salientar que</a:t>
-            </a:r>
-            <a:r>
-              <a:rPr lang="pt-BR" baseline="0" dirty="0"/>
-              <a:t> </a:t>
-            </a:r>
+              <a:t>O modelo com polinômio de grau 1 não captura a curvatura dos pontos de treinamento. Ele erra muito tanto para exemplos de treinamento quanto para exemplos não vistos durante o treinamento (validação). </a:t>
+            </a:r>
+          </a:p>
+          <a:p>
             <a:r>
               <a:rPr lang="pt-BR" dirty="0"/>
-              <a:t>todos os esforços de construção de um modelo são limitados pelos dados existentes. Para muitos problemas, o</a:t>
-            </a:r>
-            <a:r>
-              <a:rPr lang="pt-BR" baseline="0" dirty="0"/>
-              <a:t> conjunto de dados </a:t>
-            </a:r>
+              <a:t>O modelo com polinômio de grau 30 acerta a predição de todos os exemplos de treinamento, mas erraria muito para exemplos não vistos durante treinamento. </a:t>
+            </a:r>
+          </a:p>
+          <a:p>
+            <a:pPr lvl="1"/>
+            <a:r>
+              <a:rPr lang="pt-BR" b="1" dirty="0"/>
+              <a:t>A flexibilidade do modelo é tão alta que ele aprende também o ruído presente no conjunto de treinamento.</a:t>
+            </a:r>
+          </a:p>
+          <a:p>
             <a:r>
               <a:rPr lang="pt-BR" dirty="0"/>
-              <a:t>pode ter um número limitado de amostras, ele</a:t>
-            </a:r>
-            <a:r>
-              <a:rPr lang="pt-BR" baseline="0" dirty="0"/>
-              <a:t> </a:t>
+              <a:t>O modelo com polinômio de grau 2 se ajusta bem aos exemplos, mas sem acertá-los perfeitamente. Este é provavelmente o modelo ótimo em termos da </a:t>
+            </a:r>
+            <a:r>
+              <a:rPr lang="pt-BR" b="1" i="1" dirty="0"/>
+              <a:t>relação de compromisso</a:t>
             </a:r>
             <a:r>
               <a:rPr lang="pt-BR" dirty="0"/>
-              <a:t>pode ser de qualidade inferior à desejável e/ou ele pode não ser representativo</a:t>
-            </a:r>
-            <a:r>
-              <a:rPr lang="pt-BR" baseline="0" dirty="0"/>
-              <a:t> </a:t>
+              <a:t> entre os erros de </a:t>
+            </a:r>
+            <a:r>
+              <a:rPr lang="pt-BR" b="1" dirty="0"/>
+              <a:t>flexibilidade </a:t>
             </a:r>
             <a:r>
               <a:rPr lang="pt-BR" dirty="0"/>
-              <a:t>de amostras futuras.</a:t>
+              <a:t>e de </a:t>
+            </a:r>
+            <a:r>
+              <a:rPr lang="pt-BR" b="1" dirty="0"/>
+              <a:t>generalização</a:t>
+            </a:r>
+            <a:r>
+              <a:rPr lang="pt-BR" dirty="0"/>
+              <a:t>.</a:t>
             </a:r>
           </a:p>
           <a:p>
             <a:endParaRPr lang="pt-BR" dirty="0"/>
-          </a:p>
-          <a:p>
-            <a:r>
-              <a:rPr lang="pt-BR" dirty="0"/>
-              <a:t>Trabalhando com base na</a:t>
-            </a:r>
-            <a:r>
-              <a:rPr lang="pt-BR" baseline="0" dirty="0"/>
-              <a:t> </a:t>
-            </a:r>
-            <a:r>
-              <a:rPr lang="pt-BR" dirty="0"/>
-              <a:t>suposição</a:t>
-            </a:r>
-            <a:r>
-              <a:rPr lang="pt-BR" baseline="0" dirty="0"/>
-              <a:t> de que o conjunto que temos é representativo e de boa qualidade</a:t>
-            </a:r>
-            <a:r>
-              <a:rPr lang="pt-BR" dirty="0"/>
-              <a:t>, devemos usar os dados disponíveis para encontrar o melhor modelo preditivo. Quase todas as técnicas de modelagem preditiva possuem (hiper)parâmetros de ajuste que permitem que o modelo seja flexível o suficiente para encontrar a estrutura por trás dos dados.</a:t>
-            </a:r>
-          </a:p>
-          <a:p>
-            <a:endParaRPr lang="pt-BR" dirty="0"/>
-          </a:p>
-          <a:p>
-            <a:r>
-              <a:rPr lang="pt-BR" dirty="0"/>
-              <a:t>Portanto, devemos usar os dados existentes para identificar os valores dos parâmetros do modelo que geram o melhor e mais realista desempenho preditivo (conhecido como ajuste do modelo). Tradicionalmente, isso é obtido dividindo-se os dados existentes em conjuntos de treinamento e teste. O conjunto de treinamento é usado para construir e ajustar o modelo e o conjunto de teste é usado para estimar o desempenho preditivo do modelo.</a:t>
-            </a:r>
-          </a:p>
-          <a:p>
-            <a:endParaRPr lang="pt-BR" dirty="0"/>
-          </a:p>
-          <a:p>
-            <a:r>
-              <a:rPr lang="pt-BR" dirty="0"/>
-              <a:t>Durante o processo de aprendizado/treinamento, deseja-se evitar duas situações que comprometem o uso de um modelo:</a:t>
-            </a:r>
-          </a:p>
-          <a:p>
-            <a:pPr marL="171450" indent="-171450">
-              <a:buFont typeface="Arial" panose="020B0604020202020204" pitchFamily="34" charset="0"/>
-              <a:buChar char="•"/>
-            </a:pPr>
-            <a:r>
-              <a:rPr lang="pt-BR" dirty="0"/>
-              <a:t>Subajuste</a:t>
-            </a:r>
-          </a:p>
-          <a:p>
-            <a:pPr marL="171450" indent="-171450">
-              <a:buFont typeface="Arial" panose="020B0604020202020204" pitchFamily="34" charset="0"/>
-              <a:buChar char="•"/>
-            </a:pPr>
-            <a:r>
-              <a:rPr lang="pt-BR" dirty="0"/>
-              <a:t>Sobreajuste</a:t>
-            </a:r>
-          </a:p>
-          <a:p>
-            <a:pPr marL="171450" indent="-171450">
-              <a:buFont typeface="Arial" panose="020B0604020202020204" pitchFamily="34" charset="0"/>
-              <a:buChar char="•"/>
-            </a:pPr>
-            <a:endParaRPr lang="pt-BR" dirty="0"/>
-          </a:p>
-          <a:p>
-            <a:pPr marL="171450" indent="-171450">
-              <a:buFont typeface="Arial" panose="020B0604020202020204" pitchFamily="34" charset="0"/>
-              <a:buChar char="•"/>
-            </a:pPr>
-            <a:r>
-              <a:rPr lang="pt-BR" dirty="0"/>
-              <a:t>O modelo com polinômio de grau 1</a:t>
-            </a:r>
-            <a:r>
-              <a:rPr lang="pt-BR" baseline="0" dirty="0"/>
-              <a:t> tem </a:t>
-            </a:r>
-            <a:r>
-              <a:rPr lang="pt-BR" b="1" baseline="0" dirty="0"/>
-              <a:t>capacidade</a:t>
-            </a:r>
-            <a:r>
-              <a:rPr lang="pt-BR" b="0" baseline="0" dirty="0"/>
-              <a:t> muito baixa e </a:t>
-            </a:r>
-            <a:r>
-              <a:rPr lang="pt-BR" b="1" baseline="0" dirty="0"/>
-              <a:t>grau de generalização</a:t>
-            </a:r>
-            <a:r>
-              <a:rPr lang="pt-BR" b="0" baseline="0" dirty="0"/>
-              <a:t> muito baixo.</a:t>
-            </a:r>
-            <a:endParaRPr lang="pt-BR" b="1" baseline="0" dirty="0"/>
-          </a:p>
-          <a:p>
-            <a:pPr marL="171450" marR="0" indent="-171450" algn="l" defTabSz="914400" rtl="0" eaLnBrk="1" fontAlgn="auto" latinLnBrk="0" hangingPunct="1">
-              <a:lnSpc>
-                <a:spcPct val="100000"/>
-              </a:lnSpc>
-              <a:spcBef>
-                <a:spcPts val="0"/>
-              </a:spcBef>
-              <a:spcAft>
-                <a:spcPts val="0"/>
-              </a:spcAft>
-              <a:buClrTx/>
-              <a:buSzTx/>
-              <a:buFont typeface="Arial" panose="020B0604020202020204" pitchFamily="34" charset="0"/>
-              <a:buChar char="•"/>
-              <a:tabLst/>
-              <a:defRPr/>
-            </a:pPr>
-            <a:r>
-              <a:rPr lang="pt-BR" dirty="0"/>
-              <a:t>O modelo com polinômio de grau 30</a:t>
-            </a:r>
-            <a:r>
-              <a:rPr lang="pt-BR" baseline="0" dirty="0"/>
-              <a:t> tem </a:t>
-            </a:r>
-            <a:r>
-              <a:rPr lang="pt-BR" b="1" baseline="0" dirty="0"/>
-              <a:t>capacidade </a:t>
-            </a:r>
-            <a:r>
-              <a:rPr lang="pt-BR" b="0" baseline="0" dirty="0"/>
-              <a:t>muito alta e </a:t>
-            </a:r>
-            <a:r>
-              <a:rPr lang="pt-BR" b="1" baseline="0" dirty="0"/>
-              <a:t>grau de generalização</a:t>
-            </a:r>
-            <a:r>
-              <a:rPr lang="pt-BR" b="0" baseline="0" dirty="0"/>
-              <a:t> muito baixo.</a:t>
-            </a:r>
-            <a:endParaRPr lang="pt-BR" b="1" baseline="0" dirty="0"/>
-          </a:p>
-          <a:p>
-            <a:pPr marL="171450" indent="-171450">
-              <a:buFont typeface="Arial" panose="020B0604020202020204" pitchFamily="34" charset="0"/>
-              <a:buChar char="•"/>
-            </a:pPr>
-            <a:r>
-              <a:rPr lang="pt-BR" dirty="0"/>
-              <a:t>O modelo com polinômio de grau 2</a:t>
-            </a:r>
-            <a:r>
-              <a:rPr lang="pt-BR" baseline="0" dirty="0"/>
-              <a:t> tem </a:t>
-            </a:r>
-            <a:r>
-              <a:rPr lang="pt-BR" b="1" baseline="0" dirty="0"/>
-              <a:t>capacidade</a:t>
-            </a:r>
-            <a:r>
-              <a:rPr lang="pt-BR" baseline="0" dirty="0"/>
-              <a:t> média e </a:t>
-            </a:r>
-            <a:r>
-              <a:rPr lang="pt-BR" b="1" baseline="0" dirty="0"/>
-              <a:t>grau de generalização</a:t>
-            </a:r>
-            <a:r>
-              <a:rPr lang="pt-BR" b="0" baseline="0" dirty="0"/>
-              <a:t> médio.</a:t>
-            </a:r>
-          </a:p>
-          <a:p>
-            <a:pPr marL="0" indent="0">
-              <a:buFont typeface="Arial" panose="020B0604020202020204" pitchFamily="34" charset="0"/>
-              <a:buNone/>
-            </a:pPr>
-            <a:endParaRPr lang="pt-BR" b="0" baseline="0" dirty="0"/>
-          </a:p>
-          <a:p>
-            <a:pPr marL="171450" indent="-171450">
-              <a:buFont typeface="Arial" panose="020B0604020202020204" pitchFamily="34" charset="0"/>
-              <a:buChar char="•"/>
-            </a:pPr>
-            <a:r>
-              <a:rPr lang="pt-BR" dirty="0"/>
-              <a:t>O modelo com polinômio de grau 1 sofre de </a:t>
-            </a:r>
-            <a:r>
-              <a:rPr lang="pt-BR" sz="1200" b="0" i="0" kern="1200" dirty="0" err="1">
-                <a:solidFill>
-                  <a:schemeClr val="tx1"/>
-                </a:solidFill>
-                <a:effectLst/>
-                <a:latin typeface="+mn-lt"/>
-                <a:ea typeface="+mn-ea"/>
-                <a:cs typeface="+mn-cs"/>
-              </a:rPr>
-              <a:t>de</a:t>
-            </a:r>
-            <a:r>
-              <a:rPr lang="pt-BR" sz="1200" b="0" i="0" kern="1200" dirty="0">
-                <a:solidFill>
-                  <a:schemeClr val="tx1"/>
-                </a:solidFill>
-                <a:effectLst/>
-                <a:latin typeface="+mn-lt"/>
-                <a:ea typeface="+mn-ea"/>
-                <a:cs typeface="+mn-cs"/>
-              </a:rPr>
-              <a:t> </a:t>
-            </a:r>
-            <a:r>
-              <a:rPr lang="pt-BR" sz="1200" b="1" i="0" kern="1200" dirty="0" err="1">
-                <a:solidFill>
-                  <a:schemeClr val="tx1"/>
-                </a:solidFill>
-                <a:effectLst/>
-                <a:latin typeface="+mn-lt"/>
-                <a:ea typeface="+mn-ea"/>
-                <a:cs typeface="+mn-cs"/>
-              </a:rPr>
-              <a:t>sub-ajustamento</a:t>
-            </a:r>
-            <a:r>
-              <a:rPr lang="pt-BR" sz="1200" b="0" i="0" kern="1200" dirty="0">
-                <a:solidFill>
-                  <a:schemeClr val="tx1"/>
-                </a:solidFill>
-                <a:effectLst/>
-                <a:latin typeface="+mn-lt"/>
-                <a:ea typeface="+mn-ea"/>
-                <a:cs typeface="+mn-cs"/>
-              </a:rPr>
-              <a:t>, isto é, ele tem uma </a:t>
-            </a:r>
-            <a:r>
-              <a:rPr lang="pt-BR" sz="1200" b="1" i="0" kern="1200" dirty="0">
-                <a:solidFill>
-                  <a:schemeClr val="tx1"/>
-                </a:solidFill>
-                <a:effectLst/>
-                <a:latin typeface="+mn-lt"/>
-                <a:ea typeface="+mn-ea"/>
-                <a:cs typeface="+mn-cs"/>
-              </a:rPr>
-              <a:t>capacidade</a:t>
-            </a:r>
-            <a:r>
-              <a:rPr lang="pt-BR" sz="1200" b="0" i="0" kern="1200" dirty="0">
-                <a:solidFill>
-                  <a:schemeClr val="tx1"/>
-                </a:solidFill>
-                <a:effectLst/>
-                <a:latin typeface="+mn-lt"/>
-                <a:ea typeface="+mn-ea"/>
-                <a:cs typeface="+mn-cs"/>
-              </a:rPr>
-              <a:t> tão baixa que não consegue aprender as regularidades presentes</a:t>
-            </a:r>
-            <a:r>
-              <a:rPr lang="pt-BR" sz="1200" b="0" i="0" kern="1200" baseline="0" dirty="0">
-                <a:solidFill>
-                  <a:schemeClr val="tx1"/>
-                </a:solidFill>
-                <a:effectLst/>
-                <a:latin typeface="+mn-lt"/>
-                <a:ea typeface="+mn-ea"/>
-                <a:cs typeface="+mn-cs"/>
-              </a:rPr>
-              <a:t> </a:t>
-            </a:r>
-            <a:r>
-              <a:rPr lang="pt-BR" sz="1200" b="0" i="0" kern="1200" dirty="0">
-                <a:solidFill>
-                  <a:schemeClr val="tx1"/>
-                </a:solidFill>
-                <a:effectLst/>
-                <a:latin typeface="+mn-lt"/>
-                <a:ea typeface="+mn-ea"/>
-                <a:cs typeface="+mn-cs"/>
-              </a:rPr>
-              <a:t>no conjunto de treinamento. Nesse caso, os</a:t>
-            </a:r>
-            <a:r>
-              <a:rPr lang="pt-BR" sz="1200" b="0" i="0" kern="1200" baseline="0" dirty="0">
-                <a:solidFill>
-                  <a:schemeClr val="tx1"/>
-                </a:solidFill>
-                <a:effectLst/>
-                <a:latin typeface="+mn-lt"/>
-                <a:ea typeface="+mn-ea"/>
-                <a:cs typeface="+mn-cs"/>
-              </a:rPr>
-              <a:t> erros </a:t>
-            </a:r>
-            <a:r>
-              <a:rPr lang="pt-BR" sz="1200" b="0" i="0" kern="1200" dirty="0">
-                <a:solidFill>
-                  <a:schemeClr val="tx1"/>
-                </a:solidFill>
-                <a:effectLst/>
-                <a:latin typeface="+mn-lt"/>
-                <a:ea typeface="+mn-ea"/>
-                <a:cs typeface="+mn-cs"/>
-              </a:rPr>
-              <a:t>nos conjuntos</a:t>
-            </a:r>
-            <a:r>
-              <a:rPr lang="pt-BR" sz="1200" b="0" i="0" kern="1200" baseline="0" dirty="0">
-                <a:solidFill>
-                  <a:schemeClr val="tx1"/>
-                </a:solidFill>
-                <a:effectLst/>
-                <a:latin typeface="+mn-lt"/>
-                <a:ea typeface="+mn-ea"/>
-                <a:cs typeface="+mn-cs"/>
-              </a:rPr>
-              <a:t> </a:t>
-            </a:r>
-            <a:r>
-              <a:rPr lang="pt-BR" sz="1200" b="0" i="0" kern="1200" dirty="0">
-                <a:solidFill>
-                  <a:schemeClr val="tx1"/>
-                </a:solidFill>
-                <a:effectLst/>
-                <a:latin typeface="+mn-lt"/>
-                <a:ea typeface="+mn-ea"/>
-                <a:cs typeface="+mn-cs"/>
-              </a:rPr>
-              <a:t>de treinamento (</a:t>
-            </a:r>
-            <a:r>
-              <a:rPr lang="pt-BR" sz="1200" b="1" i="0" kern="1200" dirty="0">
-                <a:solidFill>
-                  <a:schemeClr val="tx1"/>
-                </a:solidFill>
-                <a:effectLst/>
-                <a:latin typeface="+mn-lt"/>
-                <a:ea typeface="+mn-ea"/>
-                <a:cs typeface="+mn-cs"/>
-              </a:rPr>
-              <a:t>erro de capacidade ou erro de representação</a:t>
-            </a:r>
-            <a:r>
-              <a:rPr lang="pt-BR" sz="1200" b="0" i="0" kern="1200" dirty="0">
-                <a:solidFill>
-                  <a:schemeClr val="tx1"/>
-                </a:solidFill>
-                <a:effectLst/>
-                <a:latin typeface="+mn-lt"/>
-                <a:ea typeface="+mn-ea"/>
-                <a:cs typeface="+mn-cs"/>
-              </a:rPr>
-              <a:t>) e de teste são</a:t>
-            </a:r>
-            <a:r>
-              <a:rPr lang="pt-BR" sz="1200" b="0" i="0" kern="1200" baseline="0" dirty="0">
-                <a:solidFill>
-                  <a:schemeClr val="tx1"/>
-                </a:solidFill>
-                <a:effectLst/>
-                <a:latin typeface="+mn-lt"/>
-                <a:ea typeface="+mn-ea"/>
-                <a:cs typeface="+mn-cs"/>
-              </a:rPr>
-              <a:t> altos</a:t>
-            </a:r>
-            <a:r>
-              <a:rPr lang="pt-BR" sz="1200" b="0" i="0" kern="1200" dirty="0">
-                <a:solidFill>
-                  <a:schemeClr val="tx1"/>
-                </a:solidFill>
-                <a:effectLst/>
-                <a:latin typeface="+mn-lt"/>
-                <a:ea typeface="+mn-ea"/>
-                <a:cs typeface="+mn-cs"/>
-              </a:rPr>
-              <a:t> </a:t>
-            </a:r>
-            <a:r>
-              <a:rPr lang="pt-BR" sz="1200" b="0" i="0" kern="1200" baseline="0" dirty="0">
-                <a:solidFill>
-                  <a:schemeClr val="tx1"/>
-                </a:solidFill>
-                <a:effectLst/>
-                <a:latin typeface="+mn-lt"/>
-                <a:ea typeface="+mn-ea"/>
-                <a:cs typeface="+mn-cs"/>
-              </a:rPr>
-              <a:t>(</a:t>
-            </a:r>
-            <a:r>
-              <a:rPr lang="pt-BR" sz="1200" b="1" i="0" kern="1200" baseline="0" dirty="0">
-                <a:solidFill>
-                  <a:schemeClr val="tx1"/>
-                </a:solidFill>
-                <a:effectLst/>
-                <a:latin typeface="+mn-lt"/>
-                <a:ea typeface="+mn-ea"/>
-                <a:cs typeface="+mn-cs"/>
-              </a:rPr>
-              <a:t>erro de generalização</a:t>
-            </a:r>
-            <a:r>
-              <a:rPr lang="pt-BR" sz="1200" b="0" i="0" kern="1200" baseline="0" dirty="0">
-                <a:solidFill>
-                  <a:schemeClr val="tx1"/>
-                </a:solidFill>
-                <a:effectLst/>
-                <a:latin typeface="+mn-lt"/>
-                <a:ea typeface="+mn-ea"/>
-                <a:cs typeface="+mn-cs"/>
-              </a:rPr>
-              <a:t>).</a:t>
-            </a:r>
-            <a:endParaRPr lang="pt-BR" b="0" dirty="0"/>
-          </a:p>
-          <a:p>
-            <a:pPr marL="171450" indent="-171450">
-              <a:buFont typeface="Arial" panose="020B0604020202020204" pitchFamily="34" charset="0"/>
-              <a:buChar char="•"/>
-            </a:pPr>
-            <a:r>
-              <a:rPr lang="pt-BR" dirty="0"/>
-              <a:t>O modelo com polinômio de grau 30</a:t>
-            </a:r>
-            <a:r>
-              <a:rPr lang="pt-BR" sz="1200" b="0" i="0" kern="1200" dirty="0">
-                <a:solidFill>
-                  <a:schemeClr val="tx1"/>
-                </a:solidFill>
-                <a:effectLst/>
-                <a:latin typeface="+mn-lt"/>
-                <a:ea typeface="+mn-ea"/>
-                <a:cs typeface="+mn-cs"/>
-              </a:rPr>
-              <a:t> sofre de </a:t>
-            </a:r>
-            <a:r>
-              <a:rPr lang="pt-BR" sz="1200" b="1" i="0" kern="1200" dirty="0" err="1">
-                <a:solidFill>
-                  <a:schemeClr val="tx1"/>
-                </a:solidFill>
-                <a:effectLst/>
-                <a:latin typeface="+mn-lt"/>
-                <a:ea typeface="+mn-ea"/>
-                <a:cs typeface="+mn-cs"/>
-              </a:rPr>
-              <a:t>sobre-ajustamento</a:t>
-            </a:r>
-            <a:r>
-              <a:rPr lang="pt-BR" sz="1200" b="0" i="0" kern="1200" dirty="0">
-                <a:solidFill>
-                  <a:schemeClr val="tx1"/>
-                </a:solidFill>
-                <a:effectLst/>
-                <a:latin typeface="+mn-lt"/>
-                <a:ea typeface="+mn-ea"/>
-                <a:cs typeface="+mn-cs"/>
-              </a:rPr>
-              <a:t>, isto é, ele tem uma capacidade tão alta que além de aprender as regularidades, aprendeu também o ruído presente nos exemplos de treinamento. Nesse caso, o erro no conjunto de treinamento é baixo (</a:t>
-            </a:r>
-            <a:r>
-              <a:rPr lang="pt-BR" sz="1200" b="1" i="0" kern="1200" dirty="0">
-                <a:solidFill>
-                  <a:schemeClr val="tx1"/>
-                </a:solidFill>
-                <a:effectLst/>
-                <a:latin typeface="+mn-lt"/>
-                <a:ea typeface="+mn-ea"/>
-                <a:cs typeface="+mn-cs"/>
-              </a:rPr>
-              <a:t>erro de capacidade</a:t>
-            </a:r>
-            <a:r>
-              <a:rPr lang="pt-BR" sz="1200" b="0" i="0" kern="1200" dirty="0">
-                <a:solidFill>
-                  <a:schemeClr val="tx1"/>
-                </a:solidFill>
-                <a:effectLst/>
-                <a:latin typeface="+mn-lt"/>
-                <a:ea typeface="+mn-ea"/>
-                <a:cs typeface="+mn-cs"/>
-              </a:rPr>
-              <a:t>) e o erro no conjunto de teste</a:t>
-            </a:r>
-            <a:r>
-              <a:rPr lang="pt-BR" sz="1200" b="0" i="0" kern="1200" baseline="0" dirty="0">
-                <a:solidFill>
-                  <a:schemeClr val="tx1"/>
-                </a:solidFill>
-                <a:effectLst/>
-                <a:latin typeface="+mn-lt"/>
-                <a:ea typeface="+mn-ea"/>
-                <a:cs typeface="+mn-cs"/>
-              </a:rPr>
-              <a:t> é alto (</a:t>
-            </a:r>
-            <a:r>
-              <a:rPr lang="pt-BR" sz="1200" b="1" i="0" kern="1200" baseline="0" dirty="0">
-                <a:solidFill>
-                  <a:schemeClr val="tx1"/>
-                </a:solidFill>
-                <a:effectLst/>
-                <a:latin typeface="+mn-lt"/>
-                <a:ea typeface="+mn-ea"/>
-                <a:cs typeface="+mn-cs"/>
-              </a:rPr>
-              <a:t>erro de generalização</a:t>
-            </a:r>
-            <a:r>
-              <a:rPr lang="pt-BR" sz="1200" b="0" i="0" kern="1200" baseline="0" dirty="0">
-                <a:solidFill>
-                  <a:schemeClr val="tx1"/>
-                </a:solidFill>
-                <a:effectLst/>
-                <a:latin typeface="+mn-lt"/>
-                <a:ea typeface="+mn-ea"/>
-                <a:cs typeface="+mn-cs"/>
-              </a:rPr>
-              <a:t>).</a:t>
-            </a:r>
-            <a:endParaRPr lang="pt-BR" sz="1200" b="0" i="0" kern="1200" dirty="0">
-              <a:solidFill>
-                <a:schemeClr val="tx1"/>
-              </a:solidFill>
-              <a:effectLst/>
-              <a:latin typeface="+mn-lt"/>
-              <a:ea typeface="+mn-ea"/>
-              <a:cs typeface="+mn-cs"/>
-            </a:endParaRPr>
-          </a:p>
-          <a:p>
-            <a:pPr marL="171450" indent="-171450">
-              <a:buFont typeface="Arial" panose="020B0604020202020204" pitchFamily="34" charset="0"/>
-              <a:buChar char="•"/>
-            </a:pPr>
-            <a:r>
-              <a:rPr lang="pt-BR" dirty="0"/>
-              <a:t>O modelo com polinômio de grau 2</a:t>
-            </a:r>
-            <a:r>
-              <a:rPr lang="pt-BR" sz="1200" b="0" i="0" kern="1200" baseline="0" dirty="0">
-                <a:solidFill>
-                  <a:schemeClr val="tx1"/>
-                </a:solidFill>
-                <a:effectLst/>
-                <a:latin typeface="+mn-lt"/>
-                <a:ea typeface="+mn-ea"/>
-                <a:cs typeface="+mn-cs"/>
-              </a:rPr>
-              <a:t> </a:t>
-            </a:r>
-            <a:r>
-              <a:rPr lang="pt-BR" sz="1200" b="0" i="0" kern="1200" dirty="0">
-                <a:solidFill>
-                  <a:schemeClr val="tx1"/>
-                </a:solidFill>
-                <a:effectLst/>
-                <a:latin typeface="+mn-lt"/>
-                <a:ea typeface="+mn-ea"/>
-                <a:cs typeface="+mn-cs"/>
-              </a:rPr>
-              <a:t>parece ter aprendido bem as regularidades dos dados sem aprender o ruído no conjunto de treinamento. Nesse caso, os erros no conjunto de treinamento (</a:t>
-            </a:r>
-            <a:r>
-              <a:rPr lang="pt-BR" sz="1200" b="1" i="0" kern="1200" dirty="0">
-                <a:solidFill>
-                  <a:schemeClr val="tx1"/>
-                </a:solidFill>
-                <a:effectLst/>
-                <a:latin typeface="+mn-lt"/>
-                <a:ea typeface="+mn-ea"/>
-                <a:cs typeface="+mn-cs"/>
-              </a:rPr>
-              <a:t>erro de capacidade</a:t>
-            </a:r>
-            <a:r>
-              <a:rPr lang="pt-BR" sz="1200" b="0" i="0" kern="1200" dirty="0">
-                <a:solidFill>
-                  <a:schemeClr val="tx1"/>
-                </a:solidFill>
-                <a:effectLst/>
-                <a:latin typeface="+mn-lt"/>
-                <a:ea typeface="+mn-ea"/>
-                <a:cs typeface="+mn-cs"/>
-              </a:rPr>
-              <a:t>) e teste </a:t>
-            </a:r>
-            <a:r>
-              <a:rPr lang="pt-BR" sz="1200" b="0" i="0" kern="1200" baseline="0" dirty="0">
-                <a:solidFill>
-                  <a:schemeClr val="tx1"/>
-                </a:solidFill>
-                <a:effectLst/>
-                <a:latin typeface="+mn-lt"/>
-                <a:ea typeface="+mn-ea"/>
-                <a:cs typeface="+mn-cs"/>
-              </a:rPr>
-              <a:t>(</a:t>
-            </a:r>
-            <a:r>
-              <a:rPr lang="pt-BR" sz="1200" b="1" i="0" kern="1200" baseline="0" dirty="0">
-                <a:solidFill>
-                  <a:schemeClr val="tx1"/>
-                </a:solidFill>
-                <a:effectLst/>
-                <a:latin typeface="+mn-lt"/>
-                <a:ea typeface="+mn-ea"/>
-                <a:cs typeface="+mn-cs"/>
-              </a:rPr>
-              <a:t>erro de generalização</a:t>
-            </a:r>
-            <a:r>
-              <a:rPr lang="pt-BR" sz="1200" b="0" i="0" kern="1200" baseline="0" dirty="0">
-                <a:solidFill>
-                  <a:schemeClr val="tx1"/>
-                </a:solidFill>
-                <a:effectLst/>
-                <a:latin typeface="+mn-lt"/>
-                <a:ea typeface="+mn-ea"/>
-                <a:cs typeface="+mn-cs"/>
-              </a:rPr>
-              <a:t>) </a:t>
-            </a:r>
-            <a:r>
-              <a:rPr lang="pt-BR" sz="1200" b="0" i="0" kern="1200" dirty="0">
-                <a:solidFill>
-                  <a:schemeClr val="tx1"/>
-                </a:solidFill>
-                <a:effectLst/>
-                <a:latin typeface="+mn-lt"/>
-                <a:ea typeface="+mn-ea"/>
-                <a:cs typeface="+mn-cs"/>
-              </a:rPr>
-              <a:t>são parecidos e satisfatórios.</a:t>
-            </a:r>
-            <a:endParaRPr lang="pt-BR" b="1" dirty="0"/>
           </a:p>
           <a:p>
             <a:endParaRPr lang="pt-BR" dirty="0"/>
@@ -3253,7 +2222,7 @@
           <a:p>
             <a:fld id="{DA8B99DF-01BC-492A-8CEF-4FD88D18DD9D}" type="slidenum">
               <a:rPr lang="nl-BE" smtClean="0"/>
-              <a:t>27</a:t>
+              <a:t>26</a:t>
             </a:fld>
             <a:endParaRPr lang="nl-BE"/>
           </a:p>
@@ -3262,7 +2231,7 @@
     </p:spTree>
     <p:extLst>
       <p:ext uri="{BB962C8B-B14F-4D97-AF65-F5344CB8AC3E}">
-        <p14:creationId xmlns:p14="http://schemas.microsoft.com/office/powerpoint/2010/main" val="3557942293"/>
+        <p14:creationId xmlns:p14="http://schemas.microsoft.com/office/powerpoint/2010/main" val="430199544"/>
       </p:ext>
     </p:extLst>
   </p:cSld>
@@ -4141,6 +3110,810 @@
           <a:p>
             <a:fld id="{DA8B99DF-01BC-492A-8CEF-4FD88D18DD9D}" type="slidenum">
               <a:rPr lang="nl-BE" smtClean="0"/>
+              <a:t>27</a:t>
+            </a:fld>
+            <a:endParaRPr lang="nl-BE"/>
+          </a:p>
+        </p:txBody>
+      </p:sp>
+    </p:spTree>
+    <p:extLst>
+      <p:ext uri="{BB962C8B-B14F-4D97-AF65-F5344CB8AC3E}">
+        <p14:creationId xmlns:p14="http://schemas.microsoft.com/office/powerpoint/2010/main" val="3557942293"/>
+      </p:ext>
+    </p:extLst>
+  </p:cSld>
+  <p:clrMapOvr>
+    <a:masterClrMapping/>
+  </p:clrMapOvr>
+</p:notes>
+</file>
+
+<file path=ppt/notesSlides/notesSlide21.xml><?xml version="1.0" encoding="utf-8"?>
+<p:notes xmlns:a="http://schemas.openxmlformats.org/drawingml/2006/main" xmlns:r="http://schemas.openxmlformats.org/officeDocument/2006/relationships" xmlns:p="http://schemas.openxmlformats.org/presentationml/2006/main">
+  <p:cSld>
+    <p:spTree>
+      <p:nvGrpSpPr>
+        <p:cNvPr id="1" name=""/>
+        <p:cNvGrpSpPr/>
+        <p:nvPr/>
+      </p:nvGrpSpPr>
+      <p:grpSpPr>
+        <a:xfrm>
+          <a:off x="0" y="0"/>
+          <a:ext cx="0" cy="0"/>
+          <a:chOff x="0" y="0"/>
+          <a:chExt cx="0" cy="0"/>
+        </a:xfrm>
+      </p:grpSpPr>
+      <p:sp>
+        <p:nvSpPr>
+          <p:cNvPr id="2" name="Espaço Reservado para Imagem de Slide 1"/>
+          <p:cNvSpPr>
+            <a:spLocks noGrp="1" noRot="1" noChangeAspect="1"/>
+          </p:cNvSpPr>
+          <p:nvPr>
+            <p:ph type="sldImg"/>
+          </p:nvPr>
+        </p:nvSpPr>
+        <p:spPr/>
+      </p:sp>
+      <p:sp>
+        <p:nvSpPr>
+          <p:cNvPr id="3" name="Espaço Reservado para Anotações 2"/>
+          <p:cNvSpPr>
+            <a:spLocks noGrp="1"/>
+          </p:cNvSpPr>
+          <p:nvPr>
+            <p:ph type="body" idx="1"/>
+          </p:nvPr>
+        </p:nvSpPr>
+        <p:spPr/>
+        <p:txBody>
+          <a:bodyPr/>
+          <a:lstStyle/>
+          <a:p>
+            <a:r>
+              <a:rPr lang="pt-BR" dirty="0"/>
+              <a:t>Binder: https://mybinder.org/v2/gh/zz4fap/t319_aprendizado_de_maquina/main?filepath=notebooks/regression/polynomial_regression.ipynb</a:t>
+            </a:r>
+          </a:p>
+          <a:p>
+            <a:endParaRPr lang="pt-BR" dirty="0"/>
+          </a:p>
+          <a:p>
+            <a:pPr marL="0" marR="0" lvl="0" indent="0" algn="l" defTabSz="914400" rtl="0" eaLnBrk="1" fontAlgn="auto" latinLnBrk="0" hangingPunct="1">
+              <a:lnSpc>
+                <a:spcPct val="100000"/>
+              </a:lnSpc>
+              <a:spcBef>
+                <a:spcPts val="0"/>
+              </a:spcBef>
+              <a:spcAft>
+                <a:spcPts val="0"/>
+              </a:spcAft>
+              <a:buClrTx/>
+              <a:buSzTx/>
+              <a:buFontTx/>
+              <a:buNone/>
+              <a:tabLst/>
+              <a:defRPr/>
+            </a:pPr>
+            <a:r>
+              <a:rPr lang="pt-BR" dirty="0" err="1"/>
+              <a:t>Colab</a:t>
+            </a:r>
+            <a:r>
+              <a:rPr lang="pt-BR" dirty="0"/>
+              <a:t>: https://colab.research.google.com/github/zz4fap/t319_aprendizado_de_maquina/blob/main/notebooks/regression/polynomial_regression.ipynb</a:t>
+            </a:r>
+          </a:p>
+          <a:p>
+            <a:endParaRPr lang="pt-BR" dirty="0"/>
+          </a:p>
+          <a:p>
+            <a:r>
+              <a:rPr lang="pt-BR" dirty="0"/>
+              <a:t>É importante salientar que</a:t>
+            </a:r>
+            <a:r>
+              <a:rPr lang="pt-BR" baseline="0" dirty="0"/>
+              <a:t> </a:t>
+            </a:r>
+            <a:r>
+              <a:rPr lang="pt-BR" dirty="0"/>
+              <a:t>todos os esforços de construção de um modelo são limitados pelos dados existentes. Para muitos problemas, o</a:t>
+            </a:r>
+            <a:r>
+              <a:rPr lang="pt-BR" baseline="0" dirty="0"/>
+              <a:t> conjunto de dados </a:t>
+            </a:r>
+            <a:r>
+              <a:rPr lang="pt-BR" dirty="0"/>
+              <a:t>pode ter um número limitado de amostras, ele</a:t>
+            </a:r>
+            <a:r>
+              <a:rPr lang="pt-BR" baseline="0" dirty="0"/>
+              <a:t> </a:t>
+            </a:r>
+            <a:r>
+              <a:rPr lang="pt-BR" dirty="0"/>
+              <a:t>pode ser de qualidade inferior à desejável e/ou ele pode não ser representativo</a:t>
+            </a:r>
+            <a:r>
+              <a:rPr lang="pt-BR" baseline="0" dirty="0"/>
+              <a:t> </a:t>
+            </a:r>
+            <a:r>
+              <a:rPr lang="pt-BR" dirty="0"/>
+              <a:t>de amostras futuras.</a:t>
+            </a:r>
+          </a:p>
+          <a:p>
+            <a:endParaRPr lang="pt-BR" dirty="0"/>
+          </a:p>
+          <a:p>
+            <a:r>
+              <a:rPr lang="pt-BR" dirty="0"/>
+              <a:t>Trabalhando com base na</a:t>
+            </a:r>
+            <a:r>
+              <a:rPr lang="pt-BR" baseline="0" dirty="0"/>
+              <a:t> </a:t>
+            </a:r>
+            <a:r>
+              <a:rPr lang="pt-BR" dirty="0"/>
+              <a:t>suposição</a:t>
+            </a:r>
+            <a:r>
+              <a:rPr lang="pt-BR" baseline="0" dirty="0"/>
+              <a:t> de que o conjunto que temos é representativo e de boa qualidade</a:t>
+            </a:r>
+            <a:r>
+              <a:rPr lang="pt-BR" dirty="0"/>
+              <a:t>, devemos usar os dados disponíveis para encontrar o melhor modelo preditivo. Quase todas as técnicas de modelagem preditiva possuem (hiper)parâmetros de ajuste que permitem que o modelo seja flexível o suficiente para encontrar a estrutura por trás dos dados.</a:t>
+            </a:r>
+          </a:p>
+          <a:p>
+            <a:endParaRPr lang="pt-BR" dirty="0"/>
+          </a:p>
+          <a:p>
+            <a:r>
+              <a:rPr lang="pt-BR" dirty="0"/>
+              <a:t>Portanto, devemos usar os dados existentes para identificar os valores dos parâmetros do modelo que geram o melhor e mais realista desempenho preditivo (conhecido como ajuste do modelo). Tradicionalmente, isso é obtido dividindo-se os dados existentes em conjuntos de treinamento e teste. O conjunto de treinamento é usado para construir e ajustar o modelo e o conjunto de teste é usado para estimar o desempenho preditivo do modelo.</a:t>
+            </a:r>
+          </a:p>
+          <a:p>
+            <a:endParaRPr lang="pt-BR" dirty="0"/>
+          </a:p>
+          <a:p>
+            <a:r>
+              <a:rPr lang="pt-BR" dirty="0"/>
+              <a:t>Durante o processo de aprendizado/treinamento, deseja-se evitar duas situações que comprometem o uso de um modelo:</a:t>
+            </a:r>
+          </a:p>
+          <a:p>
+            <a:pPr marL="171450" indent="-171450">
+              <a:buFont typeface="Arial" panose="020B0604020202020204" pitchFamily="34" charset="0"/>
+              <a:buChar char="•"/>
+            </a:pPr>
+            <a:r>
+              <a:rPr lang="pt-BR" dirty="0"/>
+              <a:t>Subajuste</a:t>
+            </a:r>
+          </a:p>
+          <a:p>
+            <a:pPr marL="171450" indent="-171450">
+              <a:buFont typeface="Arial" panose="020B0604020202020204" pitchFamily="34" charset="0"/>
+              <a:buChar char="•"/>
+            </a:pPr>
+            <a:r>
+              <a:rPr lang="pt-BR" dirty="0"/>
+              <a:t>Sobreajuste</a:t>
+            </a:r>
+          </a:p>
+          <a:p>
+            <a:pPr marL="171450" indent="-171450">
+              <a:buFont typeface="Arial" panose="020B0604020202020204" pitchFamily="34" charset="0"/>
+              <a:buChar char="•"/>
+            </a:pPr>
+            <a:endParaRPr lang="pt-BR" dirty="0"/>
+          </a:p>
+          <a:p>
+            <a:pPr marL="171450" indent="-171450">
+              <a:buFont typeface="Arial" panose="020B0604020202020204" pitchFamily="34" charset="0"/>
+              <a:buChar char="•"/>
+            </a:pPr>
+            <a:r>
+              <a:rPr lang="pt-BR" dirty="0"/>
+              <a:t>O modelo com polinômio de grau 1</a:t>
+            </a:r>
+            <a:r>
+              <a:rPr lang="pt-BR" baseline="0" dirty="0"/>
+              <a:t> tem </a:t>
+            </a:r>
+            <a:r>
+              <a:rPr lang="pt-BR" b="1" baseline="0" dirty="0"/>
+              <a:t>capacidade</a:t>
+            </a:r>
+            <a:r>
+              <a:rPr lang="pt-BR" b="0" baseline="0" dirty="0"/>
+              <a:t> muito baixa e </a:t>
+            </a:r>
+            <a:r>
+              <a:rPr lang="pt-BR" b="1" baseline="0" dirty="0"/>
+              <a:t>grau de generalização</a:t>
+            </a:r>
+            <a:r>
+              <a:rPr lang="pt-BR" b="0" baseline="0" dirty="0"/>
+              <a:t> muito baixo.</a:t>
+            </a:r>
+            <a:endParaRPr lang="pt-BR" b="1" baseline="0" dirty="0"/>
+          </a:p>
+          <a:p>
+            <a:pPr marL="171450" marR="0" indent="-171450" algn="l" defTabSz="914400" rtl="0" eaLnBrk="1" fontAlgn="auto" latinLnBrk="0" hangingPunct="1">
+              <a:lnSpc>
+                <a:spcPct val="100000"/>
+              </a:lnSpc>
+              <a:spcBef>
+                <a:spcPts val="0"/>
+              </a:spcBef>
+              <a:spcAft>
+                <a:spcPts val="0"/>
+              </a:spcAft>
+              <a:buClrTx/>
+              <a:buSzTx/>
+              <a:buFont typeface="Arial" panose="020B0604020202020204" pitchFamily="34" charset="0"/>
+              <a:buChar char="•"/>
+              <a:tabLst/>
+              <a:defRPr/>
+            </a:pPr>
+            <a:r>
+              <a:rPr lang="pt-BR" dirty="0"/>
+              <a:t>O modelo com polinômio de grau 30</a:t>
+            </a:r>
+            <a:r>
+              <a:rPr lang="pt-BR" baseline="0" dirty="0"/>
+              <a:t> tem </a:t>
+            </a:r>
+            <a:r>
+              <a:rPr lang="pt-BR" b="1" baseline="0" dirty="0"/>
+              <a:t>capacidade </a:t>
+            </a:r>
+            <a:r>
+              <a:rPr lang="pt-BR" b="0" baseline="0" dirty="0"/>
+              <a:t>muito alta e </a:t>
+            </a:r>
+            <a:r>
+              <a:rPr lang="pt-BR" b="1" baseline="0" dirty="0"/>
+              <a:t>grau de generalização</a:t>
+            </a:r>
+            <a:r>
+              <a:rPr lang="pt-BR" b="0" baseline="0" dirty="0"/>
+              <a:t> muito baixo.</a:t>
+            </a:r>
+            <a:endParaRPr lang="pt-BR" b="1" baseline="0" dirty="0"/>
+          </a:p>
+          <a:p>
+            <a:pPr marL="171450" indent="-171450">
+              <a:buFont typeface="Arial" panose="020B0604020202020204" pitchFamily="34" charset="0"/>
+              <a:buChar char="•"/>
+            </a:pPr>
+            <a:r>
+              <a:rPr lang="pt-BR" dirty="0"/>
+              <a:t>O modelo com polinômio de grau 2</a:t>
+            </a:r>
+            <a:r>
+              <a:rPr lang="pt-BR" baseline="0" dirty="0"/>
+              <a:t> tem </a:t>
+            </a:r>
+            <a:r>
+              <a:rPr lang="pt-BR" b="1" baseline="0" dirty="0"/>
+              <a:t>capacidade</a:t>
+            </a:r>
+            <a:r>
+              <a:rPr lang="pt-BR" baseline="0" dirty="0"/>
+              <a:t> média e </a:t>
+            </a:r>
+            <a:r>
+              <a:rPr lang="pt-BR" b="1" baseline="0" dirty="0"/>
+              <a:t>grau de generalização</a:t>
+            </a:r>
+            <a:r>
+              <a:rPr lang="pt-BR" b="0" baseline="0" dirty="0"/>
+              <a:t> médio.</a:t>
+            </a:r>
+          </a:p>
+          <a:p>
+            <a:pPr marL="0" indent="0">
+              <a:buFont typeface="Arial" panose="020B0604020202020204" pitchFamily="34" charset="0"/>
+              <a:buNone/>
+            </a:pPr>
+            <a:endParaRPr lang="pt-BR" b="0" baseline="0" dirty="0"/>
+          </a:p>
+          <a:p>
+            <a:pPr marL="171450" indent="-171450">
+              <a:buFont typeface="Arial" panose="020B0604020202020204" pitchFamily="34" charset="0"/>
+              <a:buChar char="•"/>
+            </a:pPr>
+            <a:r>
+              <a:rPr lang="pt-BR" dirty="0"/>
+              <a:t>O modelo com polinômio de grau 1 sofre de </a:t>
+            </a:r>
+            <a:r>
+              <a:rPr lang="pt-BR" sz="1200" b="0" i="0" kern="1200" dirty="0" err="1">
+                <a:solidFill>
+                  <a:schemeClr val="tx1"/>
+                </a:solidFill>
+                <a:effectLst/>
+                <a:latin typeface="+mn-lt"/>
+                <a:ea typeface="+mn-ea"/>
+                <a:cs typeface="+mn-cs"/>
+              </a:rPr>
+              <a:t>de</a:t>
+            </a:r>
+            <a:r>
+              <a:rPr lang="pt-BR" sz="1200" b="0" i="0" kern="1200" dirty="0">
+                <a:solidFill>
+                  <a:schemeClr val="tx1"/>
+                </a:solidFill>
+                <a:effectLst/>
+                <a:latin typeface="+mn-lt"/>
+                <a:ea typeface="+mn-ea"/>
+                <a:cs typeface="+mn-cs"/>
+              </a:rPr>
+              <a:t> </a:t>
+            </a:r>
+            <a:r>
+              <a:rPr lang="pt-BR" sz="1200" b="1" i="0" kern="1200" dirty="0" err="1">
+                <a:solidFill>
+                  <a:schemeClr val="tx1"/>
+                </a:solidFill>
+                <a:effectLst/>
+                <a:latin typeface="+mn-lt"/>
+                <a:ea typeface="+mn-ea"/>
+                <a:cs typeface="+mn-cs"/>
+              </a:rPr>
+              <a:t>sub-ajustamento</a:t>
+            </a:r>
+            <a:r>
+              <a:rPr lang="pt-BR" sz="1200" b="0" i="0" kern="1200" dirty="0">
+                <a:solidFill>
+                  <a:schemeClr val="tx1"/>
+                </a:solidFill>
+                <a:effectLst/>
+                <a:latin typeface="+mn-lt"/>
+                <a:ea typeface="+mn-ea"/>
+                <a:cs typeface="+mn-cs"/>
+              </a:rPr>
+              <a:t>, isto é, ele tem uma </a:t>
+            </a:r>
+            <a:r>
+              <a:rPr lang="pt-BR" sz="1200" b="1" i="0" kern="1200" dirty="0">
+                <a:solidFill>
+                  <a:schemeClr val="tx1"/>
+                </a:solidFill>
+                <a:effectLst/>
+                <a:latin typeface="+mn-lt"/>
+                <a:ea typeface="+mn-ea"/>
+                <a:cs typeface="+mn-cs"/>
+              </a:rPr>
+              <a:t>capacidade</a:t>
+            </a:r>
+            <a:r>
+              <a:rPr lang="pt-BR" sz="1200" b="0" i="0" kern="1200" dirty="0">
+                <a:solidFill>
+                  <a:schemeClr val="tx1"/>
+                </a:solidFill>
+                <a:effectLst/>
+                <a:latin typeface="+mn-lt"/>
+                <a:ea typeface="+mn-ea"/>
+                <a:cs typeface="+mn-cs"/>
+              </a:rPr>
+              <a:t> tão baixa que não consegue aprender as regularidades presentes</a:t>
+            </a:r>
+            <a:r>
+              <a:rPr lang="pt-BR" sz="1200" b="0" i="0" kern="1200" baseline="0" dirty="0">
+                <a:solidFill>
+                  <a:schemeClr val="tx1"/>
+                </a:solidFill>
+                <a:effectLst/>
+                <a:latin typeface="+mn-lt"/>
+                <a:ea typeface="+mn-ea"/>
+                <a:cs typeface="+mn-cs"/>
+              </a:rPr>
+              <a:t> </a:t>
+            </a:r>
+            <a:r>
+              <a:rPr lang="pt-BR" sz="1200" b="0" i="0" kern="1200" dirty="0">
+                <a:solidFill>
+                  <a:schemeClr val="tx1"/>
+                </a:solidFill>
+                <a:effectLst/>
+                <a:latin typeface="+mn-lt"/>
+                <a:ea typeface="+mn-ea"/>
+                <a:cs typeface="+mn-cs"/>
+              </a:rPr>
+              <a:t>no conjunto de treinamento. Nesse caso, os</a:t>
+            </a:r>
+            <a:r>
+              <a:rPr lang="pt-BR" sz="1200" b="0" i="0" kern="1200" baseline="0" dirty="0">
+                <a:solidFill>
+                  <a:schemeClr val="tx1"/>
+                </a:solidFill>
+                <a:effectLst/>
+                <a:latin typeface="+mn-lt"/>
+                <a:ea typeface="+mn-ea"/>
+                <a:cs typeface="+mn-cs"/>
+              </a:rPr>
+              <a:t> erros </a:t>
+            </a:r>
+            <a:r>
+              <a:rPr lang="pt-BR" sz="1200" b="0" i="0" kern="1200" dirty="0">
+                <a:solidFill>
+                  <a:schemeClr val="tx1"/>
+                </a:solidFill>
+                <a:effectLst/>
+                <a:latin typeface="+mn-lt"/>
+                <a:ea typeface="+mn-ea"/>
+                <a:cs typeface="+mn-cs"/>
+              </a:rPr>
+              <a:t>nos conjuntos</a:t>
+            </a:r>
+            <a:r>
+              <a:rPr lang="pt-BR" sz="1200" b="0" i="0" kern="1200" baseline="0" dirty="0">
+                <a:solidFill>
+                  <a:schemeClr val="tx1"/>
+                </a:solidFill>
+                <a:effectLst/>
+                <a:latin typeface="+mn-lt"/>
+                <a:ea typeface="+mn-ea"/>
+                <a:cs typeface="+mn-cs"/>
+              </a:rPr>
+              <a:t> </a:t>
+            </a:r>
+            <a:r>
+              <a:rPr lang="pt-BR" sz="1200" b="0" i="0" kern="1200" dirty="0">
+                <a:solidFill>
+                  <a:schemeClr val="tx1"/>
+                </a:solidFill>
+                <a:effectLst/>
+                <a:latin typeface="+mn-lt"/>
+                <a:ea typeface="+mn-ea"/>
+                <a:cs typeface="+mn-cs"/>
+              </a:rPr>
+              <a:t>de treinamento (</a:t>
+            </a:r>
+            <a:r>
+              <a:rPr lang="pt-BR" sz="1200" b="1" i="0" kern="1200" dirty="0">
+                <a:solidFill>
+                  <a:schemeClr val="tx1"/>
+                </a:solidFill>
+                <a:effectLst/>
+                <a:latin typeface="+mn-lt"/>
+                <a:ea typeface="+mn-ea"/>
+                <a:cs typeface="+mn-cs"/>
+              </a:rPr>
+              <a:t>erro de capacidade ou erro de representação</a:t>
+            </a:r>
+            <a:r>
+              <a:rPr lang="pt-BR" sz="1200" b="0" i="0" kern="1200" dirty="0">
+                <a:solidFill>
+                  <a:schemeClr val="tx1"/>
+                </a:solidFill>
+                <a:effectLst/>
+                <a:latin typeface="+mn-lt"/>
+                <a:ea typeface="+mn-ea"/>
+                <a:cs typeface="+mn-cs"/>
+              </a:rPr>
+              <a:t>) e de teste são</a:t>
+            </a:r>
+            <a:r>
+              <a:rPr lang="pt-BR" sz="1200" b="0" i="0" kern="1200" baseline="0" dirty="0">
+                <a:solidFill>
+                  <a:schemeClr val="tx1"/>
+                </a:solidFill>
+                <a:effectLst/>
+                <a:latin typeface="+mn-lt"/>
+                <a:ea typeface="+mn-ea"/>
+                <a:cs typeface="+mn-cs"/>
+              </a:rPr>
+              <a:t> altos</a:t>
+            </a:r>
+            <a:r>
+              <a:rPr lang="pt-BR" sz="1200" b="0" i="0" kern="1200" dirty="0">
+                <a:solidFill>
+                  <a:schemeClr val="tx1"/>
+                </a:solidFill>
+                <a:effectLst/>
+                <a:latin typeface="+mn-lt"/>
+                <a:ea typeface="+mn-ea"/>
+                <a:cs typeface="+mn-cs"/>
+              </a:rPr>
+              <a:t> </a:t>
+            </a:r>
+            <a:r>
+              <a:rPr lang="pt-BR" sz="1200" b="0" i="0" kern="1200" baseline="0" dirty="0">
+                <a:solidFill>
+                  <a:schemeClr val="tx1"/>
+                </a:solidFill>
+                <a:effectLst/>
+                <a:latin typeface="+mn-lt"/>
+                <a:ea typeface="+mn-ea"/>
+                <a:cs typeface="+mn-cs"/>
+              </a:rPr>
+              <a:t>(</a:t>
+            </a:r>
+            <a:r>
+              <a:rPr lang="pt-BR" sz="1200" b="1" i="0" kern="1200" baseline="0" dirty="0">
+                <a:solidFill>
+                  <a:schemeClr val="tx1"/>
+                </a:solidFill>
+                <a:effectLst/>
+                <a:latin typeface="+mn-lt"/>
+                <a:ea typeface="+mn-ea"/>
+                <a:cs typeface="+mn-cs"/>
+              </a:rPr>
+              <a:t>erro de generalização</a:t>
+            </a:r>
+            <a:r>
+              <a:rPr lang="pt-BR" sz="1200" b="0" i="0" kern="1200" baseline="0" dirty="0">
+                <a:solidFill>
+                  <a:schemeClr val="tx1"/>
+                </a:solidFill>
+                <a:effectLst/>
+                <a:latin typeface="+mn-lt"/>
+                <a:ea typeface="+mn-ea"/>
+                <a:cs typeface="+mn-cs"/>
+              </a:rPr>
+              <a:t>).</a:t>
+            </a:r>
+            <a:endParaRPr lang="pt-BR" b="0" dirty="0"/>
+          </a:p>
+          <a:p>
+            <a:pPr marL="171450" indent="-171450">
+              <a:buFont typeface="Arial" panose="020B0604020202020204" pitchFamily="34" charset="0"/>
+              <a:buChar char="•"/>
+            </a:pPr>
+            <a:r>
+              <a:rPr lang="pt-BR" dirty="0"/>
+              <a:t>O modelo com polinômio de grau 30</a:t>
+            </a:r>
+            <a:r>
+              <a:rPr lang="pt-BR" sz="1200" b="0" i="0" kern="1200" dirty="0">
+                <a:solidFill>
+                  <a:schemeClr val="tx1"/>
+                </a:solidFill>
+                <a:effectLst/>
+                <a:latin typeface="+mn-lt"/>
+                <a:ea typeface="+mn-ea"/>
+                <a:cs typeface="+mn-cs"/>
+              </a:rPr>
+              <a:t> sofre de </a:t>
+            </a:r>
+            <a:r>
+              <a:rPr lang="pt-BR" sz="1200" b="1" i="0" kern="1200" dirty="0" err="1">
+                <a:solidFill>
+                  <a:schemeClr val="tx1"/>
+                </a:solidFill>
+                <a:effectLst/>
+                <a:latin typeface="+mn-lt"/>
+                <a:ea typeface="+mn-ea"/>
+                <a:cs typeface="+mn-cs"/>
+              </a:rPr>
+              <a:t>sobre-ajustamento</a:t>
+            </a:r>
+            <a:r>
+              <a:rPr lang="pt-BR" sz="1200" b="0" i="0" kern="1200" dirty="0">
+                <a:solidFill>
+                  <a:schemeClr val="tx1"/>
+                </a:solidFill>
+                <a:effectLst/>
+                <a:latin typeface="+mn-lt"/>
+                <a:ea typeface="+mn-ea"/>
+                <a:cs typeface="+mn-cs"/>
+              </a:rPr>
+              <a:t>, isto é, ele tem uma capacidade tão alta que além de aprender as regularidades, aprendeu também o ruído presente nos exemplos de treinamento. Nesse caso, o erro no conjunto de treinamento é baixo (</a:t>
+            </a:r>
+            <a:r>
+              <a:rPr lang="pt-BR" sz="1200" b="1" i="0" kern="1200" dirty="0">
+                <a:solidFill>
+                  <a:schemeClr val="tx1"/>
+                </a:solidFill>
+                <a:effectLst/>
+                <a:latin typeface="+mn-lt"/>
+                <a:ea typeface="+mn-ea"/>
+                <a:cs typeface="+mn-cs"/>
+              </a:rPr>
+              <a:t>erro de capacidade</a:t>
+            </a:r>
+            <a:r>
+              <a:rPr lang="pt-BR" sz="1200" b="0" i="0" kern="1200" dirty="0">
+                <a:solidFill>
+                  <a:schemeClr val="tx1"/>
+                </a:solidFill>
+                <a:effectLst/>
+                <a:latin typeface="+mn-lt"/>
+                <a:ea typeface="+mn-ea"/>
+                <a:cs typeface="+mn-cs"/>
+              </a:rPr>
+              <a:t>) e o erro no conjunto de teste</a:t>
+            </a:r>
+            <a:r>
+              <a:rPr lang="pt-BR" sz="1200" b="0" i="0" kern="1200" baseline="0" dirty="0">
+                <a:solidFill>
+                  <a:schemeClr val="tx1"/>
+                </a:solidFill>
+                <a:effectLst/>
+                <a:latin typeface="+mn-lt"/>
+                <a:ea typeface="+mn-ea"/>
+                <a:cs typeface="+mn-cs"/>
+              </a:rPr>
+              <a:t> é alto (</a:t>
+            </a:r>
+            <a:r>
+              <a:rPr lang="pt-BR" sz="1200" b="1" i="0" kern="1200" baseline="0" dirty="0">
+                <a:solidFill>
+                  <a:schemeClr val="tx1"/>
+                </a:solidFill>
+                <a:effectLst/>
+                <a:latin typeface="+mn-lt"/>
+                <a:ea typeface="+mn-ea"/>
+                <a:cs typeface="+mn-cs"/>
+              </a:rPr>
+              <a:t>erro de generalização</a:t>
+            </a:r>
+            <a:r>
+              <a:rPr lang="pt-BR" sz="1200" b="0" i="0" kern="1200" baseline="0" dirty="0">
+                <a:solidFill>
+                  <a:schemeClr val="tx1"/>
+                </a:solidFill>
+                <a:effectLst/>
+                <a:latin typeface="+mn-lt"/>
+                <a:ea typeface="+mn-ea"/>
+                <a:cs typeface="+mn-cs"/>
+              </a:rPr>
+              <a:t>).</a:t>
+            </a:r>
+            <a:endParaRPr lang="pt-BR" sz="1200" b="0" i="0" kern="1200" dirty="0">
+              <a:solidFill>
+                <a:schemeClr val="tx1"/>
+              </a:solidFill>
+              <a:effectLst/>
+              <a:latin typeface="+mn-lt"/>
+              <a:ea typeface="+mn-ea"/>
+              <a:cs typeface="+mn-cs"/>
+            </a:endParaRPr>
+          </a:p>
+          <a:p>
+            <a:pPr marL="171450" indent="-171450">
+              <a:buFont typeface="Arial" panose="020B0604020202020204" pitchFamily="34" charset="0"/>
+              <a:buChar char="•"/>
+            </a:pPr>
+            <a:r>
+              <a:rPr lang="pt-BR" dirty="0"/>
+              <a:t>O modelo com polinômio de grau 2</a:t>
+            </a:r>
+            <a:r>
+              <a:rPr lang="pt-BR" sz="1200" b="0" i="0" kern="1200" baseline="0" dirty="0">
+                <a:solidFill>
+                  <a:schemeClr val="tx1"/>
+                </a:solidFill>
+                <a:effectLst/>
+                <a:latin typeface="+mn-lt"/>
+                <a:ea typeface="+mn-ea"/>
+                <a:cs typeface="+mn-cs"/>
+              </a:rPr>
+              <a:t> </a:t>
+            </a:r>
+            <a:r>
+              <a:rPr lang="pt-BR" sz="1200" b="0" i="0" kern="1200" dirty="0">
+                <a:solidFill>
+                  <a:schemeClr val="tx1"/>
+                </a:solidFill>
+                <a:effectLst/>
+                <a:latin typeface="+mn-lt"/>
+                <a:ea typeface="+mn-ea"/>
+                <a:cs typeface="+mn-cs"/>
+              </a:rPr>
+              <a:t>parece ter aprendido bem as regularidades dos dados sem aprender o ruído no conjunto de treinamento. Nesse caso, os erros no conjunto de treinamento (</a:t>
+            </a:r>
+            <a:r>
+              <a:rPr lang="pt-BR" sz="1200" b="1" i="0" kern="1200" dirty="0">
+                <a:solidFill>
+                  <a:schemeClr val="tx1"/>
+                </a:solidFill>
+                <a:effectLst/>
+                <a:latin typeface="+mn-lt"/>
+                <a:ea typeface="+mn-ea"/>
+                <a:cs typeface="+mn-cs"/>
+              </a:rPr>
+              <a:t>erro de capacidade</a:t>
+            </a:r>
+            <a:r>
+              <a:rPr lang="pt-BR" sz="1200" b="0" i="0" kern="1200" dirty="0">
+                <a:solidFill>
+                  <a:schemeClr val="tx1"/>
+                </a:solidFill>
+                <a:effectLst/>
+                <a:latin typeface="+mn-lt"/>
+                <a:ea typeface="+mn-ea"/>
+                <a:cs typeface="+mn-cs"/>
+              </a:rPr>
+              <a:t>) e teste </a:t>
+            </a:r>
+            <a:r>
+              <a:rPr lang="pt-BR" sz="1200" b="0" i="0" kern="1200" baseline="0" dirty="0">
+                <a:solidFill>
+                  <a:schemeClr val="tx1"/>
+                </a:solidFill>
+                <a:effectLst/>
+                <a:latin typeface="+mn-lt"/>
+                <a:ea typeface="+mn-ea"/>
+                <a:cs typeface="+mn-cs"/>
+              </a:rPr>
+              <a:t>(</a:t>
+            </a:r>
+            <a:r>
+              <a:rPr lang="pt-BR" sz="1200" b="1" i="0" kern="1200" baseline="0" dirty="0">
+                <a:solidFill>
+                  <a:schemeClr val="tx1"/>
+                </a:solidFill>
+                <a:effectLst/>
+                <a:latin typeface="+mn-lt"/>
+                <a:ea typeface="+mn-ea"/>
+                <a:cs typeface="+mn-cs"/>
+              </a:rPr>
+              <a:t>erro de generalização</a:t>
+            </a:r>
+            <a:r>
+              <a:rPr lang="pt-BR" sz="1200" b="0" i="0" kern="1200" baseline="0" dirty="0">
+                <a:solidFill>
+                  <a:schemeClr val="tx1"/>
+                </a:solidFill>
+                <a:effectLst/>
+                <a:latin typeface="+mn-lt"/>
+                <a:ea typeface="+mn-ea"/>
+                <a:cs typeface="+mn-cs"/>
+              </a:rPr>
+              <a:t>) </a:t>
+            </a:r>
+            <a:r>
+              <a:rPr lang="pt-BR" sz="1200" b="0" i="0" kern="1200" dirty="0">
+                <a:solidFill>
+                  <a:schemeClr val="tx1"/>
+                </a:solidFill>
+                <a:effectLst/>
+                <a:latin typeface="+mn-lt"/>
+                <a:ea typeface="+mn-ea"/>
+                <a:cs typeface="+mn-cs"/>
+              </a:rPr>
+              <a:t>são parecidos e satisfatórios.</a:t>
+            </a:r>
+            <a:endParaRPr lang="pt-BR" b="1" dirty="0"/>
+          </a:p>
+          <a:p>
+            <a:endParaRPr lang="pt-BR" dirty="0"/>
+          </a:p>
+        </p:txBody>
+      </p:sp>
+      <p:sp>
+        <p:nvSpPr>
+          <p:cNvPr id="4" name="Espaço Reservado para Número de Slide 3"/>
+          <p:cNvSpPr>
+            <a:spLocks noGrp="1"/>
+          </p:cNvSpPr>
+          <p:nvPr>
+            <p:ph type="sldNum" sz="quarter" idx="5"/>
+          </p:nvPr>
+        </p:nvSpPr>
+        <p:spPr/>
+        <p:txBody>
+          <a:bodyPr/>
+          <a:lstStyle/>
+          <a:p>
+            <a:fld id="{DA8B99DF-01BC-492A-8CEF-4FD88D18DD9D}" type="slidenum">
+              <a:rPr lang="nl-BE" smtClean="0"/>
               <a:t>28</a:t>
             </a:fld>
             <a:endParaRPr lang="nl-BE"/>
@@ -4160,7 +3933,7 @@
 </p:notes>
 </file>
 
-<file path=ppt/notesSlides/notesSlide21.xml><?xml version="1.0" encoding="utf-8"?>
+<file path=ppt/notesSlides/notesSlide22.xml><?xml version="1.0" encoding="utf-8"?>
 <p:notes xmlns:a="http://schemas.openxmlformats.org/drawingml/2006/main" xmlns:r="http://schemas.openxmlformats.org/officeDocument/2006/relationships" xmlns:p="http://schemas.openxmlformats.org/presentationml/2006/main">
   <p:cSld>
     <p:spTree>
@@ -6367,7 +6140,7 @@
           <a:p>
             <a:fld id="{C80E15A5-E95B-43EB-9AC7-9A96397448C0}" type="datetimeFigureOut">
               <a:rPr lang="nl-BE" smtClean="0"/>
-              <a:t>24/04/2026</a:t>
+              <a:t>8/05/2026</a:t>
             </a:fld>
             <a:endParaRPr lang="nl-BE"/>
           </a:p>
@@ -6409,7 +6182,7 @@
           <a:p>
             <a:fld id="{67C3C120-4544-49C4-A71C-C78FE5187513}" type="slidenum">
               <a:rPr lang="nl-BE" smtClean="0"/>
-              <a:t>‹#›</a:t>
+              <a:t>‹nº›</a:t>
             </a:fld>
             <a:endParaRPr lang="nl-BE"/>
           </a:p>
@@ -6537,7 +6310,7 @@
           <a:p>
             <a:fld id="{C80E15A5-E95B-43EB-9AC7-9A96397448C0}" type="datetimeFigureOut">
               <a:rPr lang="nl-BE" smtClean="0"/>
-              <a:t>24/04/2026</a:t>
+              <a:t>8/05/2026</a:t>
             </a:fld>
             <a:endParaRPr lang="nl-BE"/>
           </a:p>
@@ -6579,7 +6352,7 @@
           <a:p>
             <a:fld id="{67C3C120-4544-49C4-A71C-C78FE5187513}" type="slidenum">
               <a:rPr lang="nl-BE" smtClean="0"/>
-              <a:t>‹#›</a:t>
+              <a:t>‹nº›</a:t>
             </a:fld>
             <a:endParaRPr lang="nl-BE"/>
           </a:p>
@@ -6717,7 +6490,7 @@
           <a:p>
             <a:fld id="{C80E15A5-E95B-43EB-9AC7-9A96397448C0}" type="datetimeFigureOut">
               <a:rPr lang="nl-BE" smtClean="0"/>
-              <a:t>24/04/2026</a:t>
+              <a:t>8/05/2026</a:t>
             </a:fld>
             <a:endParaRPr lang="nl-BE"/>
           </a:p>
@@ -6759,7 +6532,7 @@
           <a:p>
             <a:fld id="{67C3C120-4544-49C4-A71C-C78FE5187513}" type="slidenum">
               <a:rPr lang="nl-BE" smtClean="0"/>
-              <a:t>‹#›</a:t>
+              <a:t>‹nº›</a:t>
             </a:fld>
             <a:endParaRPr lang="nl-BE"/>
           </a:p>
@@ -6887,7 +6660,7 @@
           <a:p>
             <a:fld id="{C80E15A5-E95B-43EB-9AC7-9A96397448C0}" type="datetimeFigureOut">
               <a:rPr lang="nl-BE" smtClean="0"/>
-              <a:t>24/04/2026</a:t>
+              <a:t>8/05/2026</a:t>
             </a:fld>
             <a:endParaRPr lang="nl-BE"/>
           </a:p>
@@ -6929,7 +6702,7 @@
           <a:p>
             <a:fld id="{67C3C120-4544-49C4-A71C-C78FE5187513}" type="slidenum">
               <a:rPr lang="nl-BE" smtClean="0"/>
-              <a:t>‹#›</a:t>
+              <a:t>‹nº›</a:t>
             </a:fld>
             <a:endParaRPr lang="nl-BE"/>
           </a:p>
@@ -7133,7 +6906,7 @@
           <a:p>
             <a:fld id="{C80E15A5-E95B-43EB-9AC7-9A96397448C0}" type="datetimeFigureOut">
               <a:rPr lang="nl-BE" smtClean="0"/>
-              <a:t>24/04/2026</a:t>
+              <a:t>8/05/2026</a:t>
             </a:fld>
             <a:endParaRPr lang="nl-BE"/>
           </a:p>
@@ -7175,7 +6948,7 @@
           <a:p>
             <a:fld id="{67C3C120-4544-49C4-A71C-C78FE5187513}" type="slidenum">
               <a:rPr lang="nl-BE" smtClean="0"/>
-              <a:t>‹#›</a:t>
+              <a:t>‹nº›</a:t>
             </a:fld>
             <a:endParaRPr lang="nl-BE"/>
           </a:p>
@@ -7365,7 +7138,7 @@
           <a:p>
             <a:fld id="{C80E15A5-E95B-43EB-9AC7-9A96397448C0}" type="datetimeFigureOut">
               <a:rPr lang="nl-BE" smtClean="0"/>
-              <a:t>24/04/2026</a:t>
+              <a:t>8/05/2026</a:t>
             </a:fld>
             <a:endParaRPr lang="nl-BE"/>
           </a:p>
@@ -7407,7 +7180,7 @@
           <a:p>
             <a:fld id="{67C3C120-4544-49C4-A71C-C78FE5187513}" type="slidenum">
               <a:rPr lang="nl-BE" smtClean="0"/>
-              <a:t>‹#›</a:t>
+              <a:t>‹nº›</a:t>
             </a:fld>
             <a:endParaRPr lang="nl-BE"/>
           </a:p>
@@ -7732,7 +7505,7 @@
           <a:p>
             <a:fld id="{C80E15A5-E95B-43EB-9AC7-9A96397448C0}" type="datetimeFigureOut">
               <a:rPr lang="nl-BE" smtClean="0"/>
-              <a:t>24/04/2026</a:t>
+              <a:t>8/05/2026</a:t>
             </a:fld>
             <a:endParaRPr lang="nl-BE"/>
           </a:p>
@@ -7774,7 +7547,7 @@
           <a:p>
             <a:fld id="{67C3C120-4544-49C4-A71C-C78FE5187513}" type="slidenum">
               <a:rPr lang="nl-BE" smtClean="0"/>
-              <a:t>‹#›</a:t>
+              <a:t>‹nº›</a:t>
             </a:fld>
             <a:endParaRPr lang="nl-BE"/>
           </a:p>
@@ -7850,7 +7623,7 @@
           <a:p>
             <a:fld id="{C80E15A5-E95B-43EB-9AC7-9A96397448C0}" type="datetimeFigureOut">
               <a:rPr lang="nl-BE" smtClean="0"/>
-              <a:t>24/04/2026</a:t>
+              <a:t>8/05/2026</a:t>
             </a:fld>
             <a:endParaRPr lang="nl-BE"/>
           </a:p>
@@ -7892,7 +7665,7 @@
           <a:p>
             <a:fld id="{67C3C120-4544-49C4-A71C-C78FE5187513}" type="slidenum">
               <a:rPr lang="nl-BE" smtClean="0"/>
-              <a:t>‹#›</a:t>
+              <a:t>‹nº›</a:t>
             </a:fld>
             <a:endParaRPr lang="nl-BE"/>
           </a:p>
@@ -7945,7 +7718,7 @@
           <a:p>
             <a:fld id="{C80E15A5-E95B-43EB-9AC7-9A96397448C0}" type="datetimeFigureOut">
               <a:rPr lang="nl-BE" smtClean="0"/>
-              <a:t>24/04/2026</a:t>
+              <a:t>8/05/2026</a:t>
             </a:fld>
             <a:endParaRPr lang="nl-BE"/>
           </a:p>
@@ -7987,7 +7760,7 @@
           <a:p>
             <a:fld id="{67C3C120-4544-49C4-A71C-C78FE5187513}" type="slidenum">
               <a:rPr lang="nl-BE" smtClean="0"/>
-              <a:t>‹#›</a:t>
+              <a:t>‹nº›</a:t>
             </a:fld>
             <a:endParaRPr lang="nl-BE"/>
           </a:p>
@@ -8222,7 +7995,7 @@
           <a:p>
             <a:fld id="{C80E15A5-E95B-43EB-9AC7-9A96397448C0}" type="datetimeFigureOut">
               <a:rPr lang="nl-BE" smtClean="0"/>
-              <a:t>24/04/2026</a:t>
+              <a:t>8/05/2026</a:t>
             </a:fld>
             <a:endParaRPr lang="nl-BE"/>
           </a:p>
@@ -8264,7 +8037,7 @@
           <a:p>
             <a:fld id="{67C3C120-4544-49C4-A71C-C78FE5187513}" type="slidenum">
               <a:rPr lang="nl-BE" smtClean="0"/>
-              <a:t>‹#›</a:t>
+              <a:t>‹nº›</a:t>
             </a:fld>
             <a:endParaRPr lang="nl-BE"/>
           </a:p>
@@ -8475,7 +8248,7 @@
           <a:p>
             <a:fld id="{C80E15A5-E95B-43EB-9AC7-9A96397448C0}" type="datetimeFigureOut">
               <a:rPr lang="nl-BE" smtClean="0"/>
-              <a:t>24/04/2026</a:t>
+              <a:t>8/05/2026</a:t>
             </a:fld>
             <a:endParaRPr lang="nl-BE"/>
           </a:p>
@@ -8517,7 +8290,7 @@
           <a:p>
             <a:fld id="{67C3C120-4544-49C4-A71C-C78FE5187513}" type="slidenum">
               <a:rPr lang="nl-BE" smtClean="0"/>
-              <a:t>‹#›</a:t>
+              <a:t>‹nº›</a:t>
             </a:fld>
             <a:endParaRPr lang="nl-BE"/>
           </a:p>
@@ -8688,7 +8461,7 @@
           <a:p>
             <a:fld id="{C80E15A5-E95B-43EB-9AC7-9A96397448C0}" type="datetimeFigureOut">
               <a:rPr lang="nl-BE" smtClean="0"/>
-              <a:t>24/04/2026</a:t>
+              <a:t>8/05/2026</a:t>
             </a:fld>
             <a:endParaRPr lang="nl-BE"/>
           </a:p>
@@ -8766,7 +8539,7 @@
           <a:p>
             <a:fld id="{67C3C120-4544-49C4-A71C-C78FE5187513}" type="slidenum">
               <a:rPr lang="nl-BE" smtClean="0"/>
-              <a:t>‹#›</a:t>
+              <a:t>‹nº›</a:t>
             </a:fld>
             <a:endParaRPr lang="nl-BE"/>
           </a:p>
@@ -9318,8 +9091,8 @@
           </a:p>
         </p:txBody>
       </p:sp>
-      <mc:AlternateContent xmlns:mc="http://schemas.openxmlformats.org/markup-compatibility/2006">
-        <mc:Choice xmlns:a14="http://schemas.microsoft.com/office/drawing/2010/main" Requires="a14">
+      <mc:AlternateContent xmlns:mc="http://schemas.openxmlformats.org/markup-compatibility/2006" xmlns:a14="http://schemas.microsoft.com/office/drawing/2010/main">
+        <mc:Choice Requires="a14">
           <p:sp>
             <p:nvSpPr>
               <p:cNvPr id="3" name="Content Placeholder 2"/>
@@ -9919,7 +9692,7 @@
             </p:txBody>
           </p:sp>
         </mc:Choice>
-        <mc:Fallback>
+        <mc:Fallback xmlns="">
           <p:sp>
             <p:nvSpPr>
               <p:cNvPr id="3" name="Content Placeholder 2"/>
@@ -10155,21 +9928,29 @@
             </a:pPr>
             <a:r>
               <a:rPr lang="pt-BR" dirty="0"/>
-              <a:t>Pois a inclinação da superfície se torna similar em todas as direções.</a:t>
-            </a:r>
-          </a:p>
-          <a:p>
-            <a:r>
-              <a:rPr lang="pt-BR" dirty="0"/>
-              <a:t>Reduz a probabilidade de </a:t>
-            </a:r>
+              <a:t>Faz com que a inclinação da superfície se torne similar em todas as direções.</a:t>
+            </a:r>
+          </a:p>
+          <a:p>
             <a:r>
               <a:rPr lang="pt-BR" b="1" i="1" dirty="0">
                 <a:solidFill>
                   <a:srgbClr val="00B050"/>
                 </a:solidFill>
               </a:rPr>
-              <a:t>problemas de precisão numérica</a:t>
+              <a:t>Reduz problemas numéricos</a:t>
+            </a:r>
+            <a:r>
+              <a:rPr lang="pt-BR" dirty="0"/>
+              <a:t> decorrentes de </a:t>
+            </a:r>
+            <a:r>
+              <a:rPr lang="pt-BR" b="1" i="1" dirty="0">
+                <a:solidFill>
+                  <a:srgbClr val="7030A0"/>
+                </a:solidFill>
+              </a:rPr>
+              <a:t>diferenças de escala entre atributos</a:t>
             </a:r>
             <a:r>
               <a:rPr lang="pt-BR" dirty="0"/>
@@ -10183,19 +9964,31 @@
             </a:pPr>
             <a:r>
               <a:rPr lang="pt-BR" dirty="0"/>
-              <a:t>Por exemplo, </a:t>
+              <a:t>Sem escalonamento, os </a:t>
             </a:r>
             <a:r>
               <a:rPr lang="pt-BR" b="1" i="1" dirty="0">
                 <a:solidFill>
-                  <a:schemeClr val="accent2"/>
+                  <a:srgbClr val="7030A0"/>
                 </a:solidFill>
               </a:rPr>
-              <a:t>atributos com valores muito grandes podem gerar erros extremamente grandes</a:t>
+              <a:t>gradientes</a:t>
             </a:r>
             <a:r>
               <a:rPr lang="pt-BR" dirty="0"/>
-              <a:t> que podem não ser representados pelas variáveis.</a:t>
+              <a:t> podem se tornar </a:t>
+            </a:r>
+            <a:r>
+              <a:rPr lang="pt-BR" b="1" i="1" dirty="0">
+                <a:solidFill>
+                  <a:srgbClr val="7030A0"/>
+                </a:solidFill>
+              </a:rPr>
+              <a:t>extremamente grandes ou pequenos</a:t>
+            </a:r>
+            <a:r>
+              <a:rPr lang="pt-BR" dirty="0"/>
+              <a:t> e podem não ser representados pelas variáveis.</a:t>
             </a:r>
           </a:p>
         </p:txBody>
@@ -10454,7 +10247,7 @@
         </p:spPr>
         <p:txBody>
           <a:bodyPr>
-            <a:normAutofit/>
+            <a:normAutofit lnSpcReduction="10000"/>
           </a:bodyPr>
           <a:lstStyle/>
           <a:p>
@@ -10468,7 +10261,7 @@
                   <a:srgbClr val="00B050"/>
                 </a:solidFill>
               </a:rPr>
-              <a:t>comparação justa do peso/influência</a:t>
+              <a:t>comparação justa do peso (influência)</a:t>
             </a:r>
             <a:r>
               <a:rPr lang="pt-BR" dirty="0"/>
@@ -10496,7 +10289,7 @@
               <a:rPr lang="pt-BR" b="0" i="0" dirty="0">
                 <a:effectLst/>
               </a:rPr>
-              <a:t>ois os pesos representam o impacto relativo dos atributos nas predições.</a:t>
+              <a:t>ois os pesos representam o impacto dos atributos nas predições (importância para o modelo).</a:t>
             </a:r>
           </a:p>
           <a:p>
@@ -10917,7 +10710,7 @@
                   <a:srgbClr val="7030A0"/>
                 </a:solidFill>
               </a:rPr>
-              <a:t>07/11/2025 – Sala I-4</a:t>
+              <a:t>05/06/2026 – Sala 1.1 (Prédio VI)</a:t>
             </a:r>
           </a:p>
           <a:p>
@@ -10959,7 +10752,7 @@
             </a:pPr>
             <a:r>
               <a:rPr lang="pt-BR" dirty="0"/>
-              <a:t>Os outros exercícios devem ser entregues até </a:t>
+              <a:t>Os outros dois exercícios devem ser entregues até </a:t>
             </a:r>
             <a:r>
               <a:rPr lang="pt-BR" b="1" dirty="0">
@@ -10967,7 +10760,7 @@
                   <a:srgbClr val="0070C0"/>
                 </a:solidFill>
               </a:rPr>
-              <a:t>28/11/2024</a:t>
+              <a:t>27/06/2026</a:t>
             </a:r>
             <a:r>
               <a:rPr lang="pt-BR" dirty="0"/>
@@ -11838,7 +11631,7 @@
         <p:spPr>
           <a:xfrm>
             <a:off x="5147733" y="1825624"/>
-            <a:ext cx="6790837" cy="5032375"/>
+            <a:ext cx="6914128" cy="5032375"/>
           </a:xfrm>
         </p:spPr>
         <p:txBody>
@@ -11932,11 +11725,21 @@
                   <a:srgbClr val="7030A0"/>
                 </a:solidFill>
               </a:rPr>
-              <a:t>encontrar o grau (ou ordem) ideal</a:t>
+              <a:t>encontrar o grau ideal</a:t>
             </a:r>
             <a:r>
               <a:rPr lang="pt-BR" dirty="0"/>
               <a:t>.</a:t>
+            </a:r>
+          </a:p>
+          <a:p>
+            <a:pPr lvl="1">
+              <a:buFont typeface="Wingdings" panose="05000000000000000000" pitchFamily="2" charset="2"/>
+              <a:buChar char="§"/>
+            </a:pPr>
+            <a:r>
+              <a:rPr lang="pt-BR" dirty="0"/>
+              <a:t>e, claro, os pesos do polinômio.</a:t>
             </a:r>
           </a:p>
         </p:txBody>
@@ -12046,8 +11849,8 @@
           </a:p>
         </p:txBody>
       </p:sp>
-      <mc:AlternateContent xmlns:mc="http://schemas.openxmlformats.org/markup-compatibility/2006" xmlns:a14="http://schemas.microsoft.com/office/drawing/2010/main">
-        <mc:Choice Requires="a14">
+      <mc:AlternateContent xmlns:mc="http://schemas.openxmlformats.org/markup-compatibility/2006">
+        <mc:Choice xmlns:a14="http://schemas.microsoft.com/office/drawing/2010/main" Requires="a14">
           <p:sp>
             <p:nvSpPr>
               <p:cNvPr id="3" name="Espaço Reservado para Conteúdo 2">
@@ -12067,7 +11870,7 @@
             <p:spPr>
               <a:xfrm>
                 <a:off x="838200" y="1825624"/>
-                <a:ext cx="11100370" cy="5032375"/>
+                <a:ext cx="11353800" cy="5032375"/>
               </a:xfrm>
             </p:spPr>
             <p:txBody>
@@ -12814,7 +12617,7 @@
               <a:p>
                 <a:r>
                   <a:rPr lang="pt-BR" dirty="0"/>
-                  <a:t>Percebam que em alguns monômios existe a </a:t>
+                  <a:t>Percebam que alguns monômios são formandos pela </a:t>
                 </a:r>
                 <a:r>
                   <a:rPr lang="pt-BR" b="1" i="1" dirty="0">
@@ -12859,10 +12662,113 @@
                   <a:t> nos dados de treinamento impacta o desempenho do modelo.</a:t>
                 </a:r>
               </a:p>
+              <a:p>
+                <a:pPr lvl="1">
+                  <a:buFont typeface="Wingdings" panose="05000000000000000000" pitchFamily="2" charset="2"/>
+                  <a:buChar char="§"/>
+                </a:pPr>
+                <a:r>
+                  <a:rPr lang="pt-BR" dirty="0"/>
+                  <a:t>Por exemplo, um </a:t>
+                </a:r>
+                <a:r>
+                  <a:rPr lang="pt-BR" i="1" dirty="0"/>
+                  <a:t>outlier</a:t>
+                </a:r>
+                <a:r>
+                  <a:rPr lang="pt-BR" dirty="0"/>
+                  <a:t> do atributo </a:t>
+                </a:r>
+                <a14:m>
+                  <m:oMath xmlns:m="http://schemas.openxmlformats.org/officeDocument/2006/math">
+                    <m:sSub>
+                      <m:sSubPr>
+                        <m:ctrlPr>
+                          <a:rPr lang="pt-BR" i="1">
+                            <a:latin typeface="Cambria Math" panose="02040503050406030204" pitchFamily="18" charset="0"/>
+                          </a:rPr>
+                        </m:ctrlPr>
+                      </m:sSubPr>
+                      <m:e>
+                        <m:r>
+                          <a:rPr lang="pt-BR" i="1">
+                            <a:latin typeface="Cambria Math" panose="02040503050406030204" pitchFamily="18" charset="0"/>
+                          </a:rPr>
+                          <m:t>𝑥</m:t>
+                        </m:r>
+                      </m:e>
+                      <m:sub>
+                        <m:r>
+                          <a:rPr lang="pt-BR" i="1">
+                            <a:latin typeface="Cambria Math" panose="02040503050406030204" pitchFamily="18" charset="0"/>
+                          </a:rPr>
+                          <m:t>1</m:t>
+                        </m:r>
+                      </m:sub>
+                    </m:sSub>
+                  </m:oMath>
+                </a14:m>
+                <a:r>
+                  <a:rPr lang="pt-BR" dirty="0"/>
+                  <a:t> com valor igual a 100, no sexto monômio, </a:t>
+                </a:r>
+                <a14:m>
+                  <m:oMath xmlns:m="http://schemas.openxmlformats.org/officeDocument/2006/math">
+                    <m:sSup>
+                      <m:sSupPr>
+                        <m:ctrlPr>
+                          <a:rPr lang="pt-BR" i="1">
+                            <a:latin typeface="Cambria Math" panose="02040503050406030204" pitchFamily="18" charset="0"/>
+                          </a:rPr>
+                        </m:ctrlPr>
+                      </m:sSupPr>
+                      <m:e>
+                        <m:sSub>
+                          <m:sSubPr>
+                            <m:ctrlPr>
+                              <a:rPr lang="pt-BR" i="1">
+                                <a:latin typeface="Cambria Math" panose="02040503050406030204" pitchFamily="18" charset="0"/>
+                              </a:rPr>
+                            </m:ctrlPr>
+                          </m:sSubPr>
+                          <m:e>
+                            <m:r>
+                              <a:rPr lang="pt-BR" i="1">
+                                <a:latin typeface="Cambria Math" panose="02040503050406030204" pitchFamily="18" charset="0"/>
+                              </a:rPr>
+                              <m:t>𝑥</m:t>
+                            </m:r>
+                          </m:e>
+                          <m:sub>
+                            <m:r>
+                              <a:rPr lang="pt-BR" i="1">
+                                <a:latin typeface="Cambria Math" panose="02040503050406030204" pitchFamily="18" charset="0"/>
+                              </a:rPr>
+                              <m:t>1</m:t>
+                            </m:r>
+                          </m:sub>
+                        </m:sSub>
+                      </m:e>
+                      <m:sup>
+                        <m:r>
+                          <a:rPr lang="pt-BR" i="1">
+                            <a:latin typeface="Cambria Math" panose="02040503050406030204" pitchFamily="18" charset="0"/>
+                          </a:rPr>
+                          <m:t>3</m:t>
+                        </m:r>
+                      </m:sup>
+                    </m:sSup>
+                  </m:oMath>
+                </a14:m>
+                <a:r>
+                  <a:rPr lang="pt-BR" dirty="0"/>
+                  <a:t>, se torna 1.000.000.</a:t>
+                </a:r>
+              </a:p>
             </p:txBody>
           </p:sp>
         </mc:Choice>
-        <mc:Fallback xmlns="">
+        <mc:Fallback>
           <p:sp>
             <p:nvSpPr>
               <p:cNvPr id="3" name="Espaço Reservado para Conteúdo 2">
@@ -12882,12 +12788,12 @@
             <p:spPr>
               <a:xfrm>
                 <a:off x="838200" y="1825624"/>
-                <a:ext cx="11100370" cy="5032375"/>
+                <a:ext cx="11353800" cy="5032375"/>
               </a:xfrm>
               <a:blipFill>
                 <a:blip r:embed="rId3"/>
                 <a:stretch>
-                  <a:fillRect l="-989" t="-1937" r="-440"/>
+                  <a:fillRect l="-967" t="-1937"/>
                 </a:stretch>
               </a:blipFill>
             </p:spPr>
@@ -12920,7 +12826,7 @@
         </p:nvSpPr>
         <p:spPr>
           <a:xfrm>
-            <a:off x="10563862" y="2374503"/>
+            <a:off x="10687150" y="2374503"/>
             <a:ext cx="1232899" cy="428625"/>
           </a:xfrm>
           <a:prstGeom prst="rect">
@@ -13283,8 +13189,8 @@
           </a:p>
         </p:txBody>
       </p:sp>
-      <mc:AlternateContent xmlns:mc="http://schemas.openxmlformats.org/markup-compatibility/2006" xmlns:a14="http://schemas.microsoft.com/office/drawing/2010/main">
-        <mc:Choice Requires="a14">
+      <mc:AlternateContent xmlns:mc="http://schemas.openxmlformats.org/markup-compatibility/2006">
+        <mc:Choice xmlns:a14="http://schemas.microsoft.com/office/drawing/2010/main" Requires="a14">
           <p:sp>
             <p:nvSpPr>
               <p:cNvPr id="3" name="Espaço Reservado para Conteúdo 2">
@@ -14440,7 +14346,7 @@
                 </a:r>
                 <a:r>
                   <a:rPr lang="pt-BR" dirty="0"/>
-                  <a:t>(equação normal, vetor gradiente para implementação do algoritmo do gradiente descendente, escalonamento) </a:t>
+                  <a:t>(equação normal, vetor gradiente para implementação de qualquer versão do algoritmo do gradiente descendente, escalonamento) </a:t>
                 </a:r>
                 <a:r>
                   <a:rPr lang="pt-BR" b="1" i="1" dirty="0">
@@ -14482,7 +14388,7 @@
             </p:txBody>
           </p:sp>
         </mc:Choice>
-        <mc:Fallback xmlns="">
+        <mc:Fallback>
           <p:sp>
             <p:nvSpPr>
               <p:cNvPr id="3" name="Espaço Reservado para Conteúdo 2">
@@ -14507,7 +14413,7 @@
               <a:blipFill>
                 <a:blip r:embed="rId2"/>
                 <a:stretch>
-                  <a:fillRect l="-1137" t="-1937"/>
+                  <a:fillRect l="-1137" t="-1937" r="-704"/>
                 </a:stretch>
               </a:blipFill>
             </p:spPr>
@@ -14516,7 +14422,7 @@
               <a:lstStyle/>
               <a:p>
                 <a:r>
-                  <a:rPr lang="pt-BR">
+                  <a:rPr lang="en-US">
                     <a:noFill/>
                   </a:rPr>
                   <a:t> </a:t>
@@ -14584,8 +14490,8 @@
           </a:p>
         </p:txBody>
       </p:sp>
-      <mc:AlternateContent xmlns:mc="http://schemas.openxmlformats.org/markup-compatibility/2006" xmlns:a14="http://schemas.microsoft.com/office/drawing/2010/main">
-        <mc:Choice Requires="a14">
+      <mc:AlternateContent xmlns:mc="http://schemas.openxmlformats.org/markup-compatibility/2006">
+        <mc:Choice xmlns:a14="http://schemas.microsoft.com/office/drawing/2010/main" Requires="a14">
           <p:sp>
             <p:nvSpPr>
               <p:cNvPr id="3" name="Espaço Reservado para Conteúdo 2">
@@ -14668,19 +14574,19 @@
                 </a14:m>
                 <a:r>
                   <a:rPr lang="pt-BR" dirty="0"/>
-                  <a:t>, são </a:t>
+                  <a:t>, usados na regressão devem </a:t>
                 </a:r>
                 <a:r>
                   <a:rPr lang="pt-BR" b="1" i="1" dirty="0">
                     <a:solidFill>
-                      <a:srgbClr val="0070C0"/>
+                      <a:srgbClr val="7030A0"/>
                     </a:solidFill>
                   </a:rPr>
-                  <a:t>compostos pelos atributos originais e pelos atributos formados através de suas combinações</a:t>
+                  <a:t>conter os atributos dos monômios</a:t>
                 </a:r>
                 <a:r>
                   <a:rPr lang="pt-BR" dirty="0"/>
-                  <a:t>.</a:t>
+                  <a:t>, sejam eles os originais ou suas combinações.</a:t>
                 </a:r>
               </a:p>
               <a:p>
@@ -15766,13 +15672,13 @@
                 </a:pPr>
                 <a:r>
                   <a:rPr lang="pt-BR" dirty="0"/>
-                  <a:t>onde cada coluna contém um atributo (original ou combinação).</a:t>
+                  <a:t>onde cada coluna contém um atributo dos monômios.</a:t>
                 </a:r>
               </a:p>
             </p:txBody>
           </p:sp>
         </mc:Choice>
-        <mc:Fallback xmlns="">
+        <mc:Fallback>
           <p:sp>
             <p:nvSpPr>
               <p:cNvPr id="3" name="Espaço Reservado para Conteúdo 2">
@@ -15795,9 +15701,9 @@
                 <a:ext cx="11213387" cy="5032375"/>
               </a:xfrm>
               <a:blipFill>
-                <a:blip r:embed="rId2"/>
+                <a:blip r:embed="rId3"/>
                 <a:stretch>
-                  <a:fillRect l="-1087" t="-1937"/>
+                  <a:fillRect l="-1087" t="-1937" r="-163"/>
                 </a:stretch>
               </a:blipFill>
             </p:spPr>
@@ -15806,7 +15712,7 @@
               <a:lstStyle/>
               <a:p>
                 <a:r>
-                  <a:rPr lang="pt-BR">
+                  <a:rPr lang="en-US">
                     <a:noFill/>
                   </a:rPr>
                   <a:t> </a:t>
@@ -16046,7 +15952,23 @@
                   <a:srgbClr val="00B050"/>
                 </a:solidFill>
               </a:rPr>
-              <a:t>qual a ordem e pesos de um polinômio </a:t>
+              <a:t>qual </a:t>
+            </a:r>
+            <a:r>
+              <a:rPr lang="pt-BR" b="1" i="1" dirty="0">
+                <a:solidFill>
+                  <a:srgbClr val="00B050"/>
+                </a:solidFill>
+              </a:rPr>
+              <a:t>o grau </a:t>
+            </a:r>
+            <a:r>
+              <a:rPr lang="pt-BR" sz="2800" b="1" i="1" dirty="0">
+                <a:solidFill>
+                  <a:srgbClr val="00B050"/>
+                </a:solidFill>
+              </a:rPr>
+              <a:t>e os pesos de um polinômio </a:t>
             </a:r>
             <a:r>
               <a:rPr lang="pt-BR" sz="2800" dirty="0"/>
@@ -16154,8 +16076,8 @@
           </a:p>
         </p:txBody>
       </p:sp>
-      <mc:AlternateContent xmlns:mc="http://schemas.openxmlformats.org/markup-compatibility/2006" xmlns:a14="http://schemas.microsoft.com/office/drawing/2010/main">
-        <mc:Choice Requires="a14">
+      <mc:AlternateContent xmlns:mc="http://schemas.openxmlformats.org/markup-compatibility/2006">
+        <mc:Choice xmlns:a14="http://schemas.microsoft.com/office/drawing/2010/main" Requires="a14">
           <p:sp>
             <p:nvSpPr>
               <p:cNvPr id="3" name="Content Placeholder 2"/>
@@ -16168,8 +16090,8 @@
             </p:nvSpPr>
             <p:spPr>
               <a:xfrm>
-                <a:off x="5266919" y="1825625"/>
-                <a:ext cx="6825766" cy="5032375"/>
+                <a:off x="5266918" y="1825625"/>
+                <a:ext cx="6925081" cy="5032375"/>
               </a:xfrm>
             </p:spPr>
             <p:txBody>
@@ -16180,7 +16102,19 @@
               <a:p>
                 <a:r>
                   <a:rPr lang="pt-BR" dirty="0"/>
-                  <a:t>Para exemplificar essa questão da busca pela ordem do polinômio </a:t>
+                  <a:t>Para exemplificar essa questão da busca pela </a:t>
+                </a:r>
+                <a:r>
+                  <a:rPr lang="pt-BR" b="1" i="1" dirty="0">
+                    <a:solidFill>
+                      <a:schemeClr val="accent2"/>
+                    </a:solidFill>
+                  </a:rPr>
+                  <a:t>melhor ordem</a:t>
+                </a:r>
+                <a:r>
+                  <a:rPr lang="pt-BR" dirty="0"/>
+                  <a:t> do polinômio </a:t>
                 </a:r>
                 <a:r>
                   <a:rPr lang="pt-BR" dirty="0" err="1"/>
@@ -16200,7 +16134,7 @@
                 </a:r>
                 <a:r>
                   <a:rPr lang="pt-BR" dirty="0"/>
-                  <a:t>da seguinte função objetivo (polinômio de ordem 2)</a:t>
+                  <a:t>da seguinte função objetivo (polinômio de grau 2)</a:t>
                 </a:r>
               </a:p>
               <a:p>
@@ -16745,7 +16679,7 @@
             </p:txBody>
           </p:sp>
         </mc:Choice>
-        <mc:Fallback xmlns="">
+        <mc:Fallback>
           <p:sp>
             <p:nvSpPr>
               <p:cNvPr id="3" name="Content Placeholder 2"/>
@@ -16758,13 +16692,13 @@
             </p:nvSpPr>
             <p:spPr>
               <a:xfrm>
-                <a:off x="5266919" y="1825625"/>
-                <a:ext cx="6825766" cy="5032375"/>
+                <a:off x="5266918" y="1825625"/>
+                <a:ext cx="6925081" cy="5032375"/>
               </a:xfrm>
               <a:blipFill>
                 <a:blip r:embed="rId3"/>
                 <a:stretch>
-                  <a:fillRect l="-1875" t="-1937"/>
+                  <a:fillRect l="-1849" t="-1937" r="-2201"/>
                 </a:stretch>
               </a:blipFill>
             </p:spPr>
@@ -16773,7 +16707,7 @@
               <a:lstStyle/>
               <a:p>
                 <a:r>
-                  <a:rPr lang="pt-BR">
+                  <a:rPr lang="en-US">
                     <a:noFill/>
                   </a:rPr>
                   <a:t> </a:t>
@@ -16997,7 +16931,7 @@
         <p:spPr>
           <a:xfrm>
             <a:off x="5691883" y="1825625"/>
-            <a:ext cx="6400801" cy="5032375"/>
+            <a:ext cx="6500117" cy="5032375"/>
           </a:xfrm>
         </p:spPr>
         <p:txBody>
@@ -17062,7 +16996,23 @@
                   <a:srgbClr val="7030A0"/>
                 </a:solidFill>
               </a:rPr>
-              <a:t>e se não soubéssemos a ordem por trás do modelo gerador, qual grau deveríamos utilizar</a:t>
+              <a:t>e se não soubéssemos o </a:t>
+            </a:r>
+            <a:r>
+              <a:rPr lang="pt-BR" b="1" i="1" dirty="0">
+                <a:solidFill>
+                  <a:schemeClr val="accent2"/>
+                </a:solidFill>
+              </a:rPr>
+              <a:t>grau</a:t>
+            </a:r>
+            <a:r>
+              <a:rPr lang="pt-BR" b="1" i="1" dirty="0">
+                <a:solidFill>
+                  <a:srgbClr val="7030A0"/>
+                </a:solidFill>
+              </a:rPr>
+              <a:t> por trás do modelo gerador, qual grau deveríamos utilizar</a:t>
             </a:r>
             <a:r>
               <a:rPr lang="pt-BR" dirty="0"/>
@@ -17215,7 +17165,7 @@
             <a:pPr algn="ctr"/>
             <a:r>
               <a:rPr lang="pt-BR" sz="1400" dirty="0"/>
-              <a:t>A partir do dados ruidosos, queremos encontrar um polinômio (pesos e ordem) que melhor se aproxime da função objetivo.</a:t>
+              <a:t>A partir do dados ruidosos, queremos encontrar um polinômio (pesos e grau) que melhor se aproxime da função objetivo.</a:t>
             </a:r>
           </a:p>
         </p:txBody>
@@ -20340,20 +20290,12 @@
           </a:p>
           <a:p>
             <a:r>
-              <a:rPr lang="pt-BR" b="1">
-                <a:solidFill>
-                  <a:srgbClr val="00B050"/>
-                </a:solidFill>
-              </a:rPr>
-              <a:t>Entrega do projeto </a:t>
-            </a:r>
-            <a:r>
               <a:rPr lang="pt-BR" b="1" dirty="0">
                 <a:solidFill>
                   <a:srgbClr val="00B050"/>
                 </a:solidFill>
               </a:rPr>
-              <a:t>final: 28/11/2025</a:t>
+              <a:t>Entrega do projeto final: 27/06/2026</a:t>
             </a:r>
           </a:p>
           <a:p>
@@ -26902,8 +26844,8 @@
           </a:p>
         </p:txBody>
       </p:sp>
-      <mc:AlternateContent xmlns:mc="http://schemas.openxmlformats.org/markup-compatibility/2006">
-        <mc:Choice xmlns:a14="http://schemas.microsoft.com/office/drawing/2010/main" Requires="a14">
+      <mc:AlternateContent xmlns:mc="http://schemas.openxmlformats.org/markup-compatibility/2006" xmlns:a14="http://schemas.microsoft.com/office/drawing/2010/main">
+        <mc:Choice Requires="a14">
           <p:sp>
             <p:nvSpPr>
               <p:cNvPr id="3" name="Espaço Reservado para Conteúdo 2">
@@ -27075,7 +27017,7 @@
             </p:txBody>
           </p:sp>
         </mc:Choice>
-        <mc:Fallback>
+        <mc:Fallback xmlns="">
           <p:sp>
             <p:nvSpPr>
               <p:cNvPr id="3" name="Espaço Reservado para Conteúdo 2">
@@ -30156,4 +30098,311 @@
     </a:ext>
   </a:extLst>
 </a:theme>
+</file>
+
+<file path=customXml/item1.xml><?xml version="1.0" encoding="utf-8"?>
+<ct:contentTypeSchema xmlns:ct="http://schemas.microsoft.com/office/2006/metadata/contentType" xmlns:ma="http://schemas.microsoft.com/office/2006/metadata/properties/metaAttributes" ct:_="" ma:_="" ma:contentTypeName="Document" ma:contentTypeID="0x010100A6553FE09A98904B92A9D00A38127206" ma:contentTypeVersion="18" ma:contentTypeDescription="Create a new document." ma:contentTypeScope="" ma:versionID="92863cfdd2d5fd2ee9b6f30d8c51b1f5">
+  <xsd:schema xmlns:xsd="http://www.w3.org/2001/XMLSchema" xmlns:xs="http://www.w3.org/2001/XMLSchema" xmlns:p="http://schemas.microsoft.com/office/2006/metadata/properties" xmlns:ns3="10322600-47b9-44f6-86ef-c87c87ba6e82" xmlns:ns4="026c264a-64f6-48aa-bde0-8bf9e5064f89" targetNamespace="http://schemas.microsoft.com/office/2006/metadata/properties" ma:root="true" ma:fieldsID="86148dd4b4cd32a5258cd233a95bdcf5" ns3:_="" ns4:_="">
+    <xsd:import namespace="10322600-47b9-44f6-86ef-c87c87ba6e82"/>
+    <xsd:import namespace="026c264a-64f6-48aa-bde0-8bf9e5064f89"/>
+    <xsd:element name="properties">
+      <xsd:complexType>
+        <xsd:sequence>
+          <xsd:element name="documentManagement">
+            <xsd:complexType>
+              <xsd:all>
+                <xsd:element ref="ns3:MediaServiceMetadata" minOccurs="0"/>
+                <xsd:element ref="ns3:MediaServiceFastMetadata" minOccurs="0"/>
+                <xsd:element ref="ns4:SharedWithUsers" minOccurs="0"/>
+                <xsd:element ref="ns4:SharedWithDetails" minOccurs="0"/>
+                <xsd:element ref="ns4:SharingHintHash" minOccurs="0"/>
+                <xsd:element ref="ns3:MediaServiceAutoTags" minOccurs="0"/>
+                <xsd:element ref="ns3:MediaServiceOCR" minOccurs="0"/>
+                <xsd:element ref="ns3:MediaServiceGenerationTime" minOccurs="0"/>
+                <xsd:element ref="ns3:MediaServiceEventHashCode" minOccurs="0"/>
+                <xsd:element ref="ns3:MediaServiceDateTaken" minOccurs="0"/>
+                <xsd:element ref="ns3:MediaLengthInSeconds" minOccurs="0"/>
+                <xsd:element ref="ns3:MediaServiceAutoKeyPoints" minOccurs="0"/>
+                <xsd:element ref="ns3:MediaServiceKeyPoints" minOccurs="0"/>
+                <xsd:element ref="ns3:MediaServiceLocation" minOccurs="0"/>
+                <xsd:element ref="ns3:MediaServiceSearchProperties" minOccurs="0"/>
+                <xsd:element ref="ns3:_activity" minOccurs="0"/>
+                <xsd:element ref="ns3:MediaServiceObjectDetectorVersions" minOccurs="0"/>
+                <xsd:element ref="ns3:MediaServiceSystemTags" minOccurs="0"/>
+              </xsd:all>
+            </xsd:complexType>
+          </xsd:element>
+        </xsd:sequence>
+      </xsd:complexType>
+    </xsd:element>
+  </xsd:schema>
+  <xsd:schema xmlns:xsd="http://www.w3.org/2001/XMLSchema" xmlns:xs="http://www.w3.org/2001/XMLSchema" xmlns:dms="http://schemas.microsoft.com/office/2006/documentManagement/types" xmlns:pc="http://schemas.microsoft.com/office/infopath/2007/PartnerControls" targetNamespace="10322600-47b9-44f6-86ef-c87c87ba6e82" elementFormDefault="qualified">
+    <xsd:import namespace="http://schemas.microsoft.com/office/2006/documentManagement/types"/>
+    <xsd:import namespace="http://schemas.microsoft.com/office/infopath/2007/PartnerControls"/>
+    <xsd:element name="MediaServiceMetadata" ma:index="8" nillable="true" ma:displayName="MediaServiceMetadata" ma:hidden="true" ma:internalName="MediaServiceMetadata" ma:readOnly="true">
+      <xsd:simpleType>
+        <xsd:restriction base="dms:Note"/>
+      </xsd:simpleType>
+    </xsd:element>
+    <xsd:element name="MediaServiceFastMetadata" ma:index="9" nillable="true" ma:displayName="MediaServiceFastMetadata" ma:hidden="true" ma:internalName="MediaServiceFastMetadata" ma:readOnly="true">
+      <xsd:simpleType>
+        <xsd:restriction base="dms:Note"/>
+      </xsd:simpleType>
+    </xsd:element>
+    <xsd:element name="MediaServiceAutoTags" ma:index="13" nillable="true" ma:displayName="Tags" ma:internalName="MediaServiceAutoTags" ma:readOnly="true">
+      <xsd:simpleType>
+        <xsd:restriction base="dms:Text"/>
+      </xsd:simpleType>
+    </xsd:element>
+    <xsd:element name="MediaServiceOCR" ma:index="14" nillable="true" ma:displayName="Extracted Text" ma:internalName="MediaServiceOCR" ma:readOnly="true">
+      <xsd:simpleType>
+        <xsd:restriction base="dms:Note">
+          <xsd:maxLength value="255"/>
+        </xsd:restriction>
+      </xsd:simpleType>
+    </xsd:element>
+    <xsd:element name="MediaServiceGenerationTime" ma:index="15" nillable="true" ma:displayName="MediaServiceGenerationTime" ma:hidden="true" ma:internalName="MediaServiceGenerationTime" ma:readOnly="true">
+      <xsd:simpleType>
+        <xsd:restriction base="dms:Text"/>
+      </xsd:simpleType>
+    </xsd:element>
+    <xsd:element name="MediaServiceEventHashCode" ma:index="16" nillable="true" ma:displayName="MediaServiceEventHashCode" ma:hidden="true" ma:internalName="MediaServiceEventHashCode" ma:readOnly="true">
+      <xsd:simpleType>
+        <xsd:restriction base="dms:Text"/>
+      </xsd:simpleType>
+    </xsd:element>
+    <xsd:element name="MediaServiceDateTaken" ma:index="17" nillable="true" ma:displayName="MediaServiceDateTaken" ma:hidden="true" ma:internalName="MediaServiceDateTaken" ma:readOnly="true">
+      <xsd:simpleType>
+        <xsd:restriction base="dms:Text"/>
+      </xsd:simpleType>
+    </xsd:element>
+    <xsd:element name="MediaLengthInSeconds" ma:index="18" nillable="true" ma:displayName="Length (seconds)" ma:internalName="MediaLengthInSeconds" ma:readOnly="true">
+      <xsd:simpleType>
+        <xsd:restriction base="dms:Unknown"/>
+      </xsd:simpleType>
+    </xsd:element>
+    <xsd:element name="MediaServiceAutoKeyPoints" ma:index="19" nillable="true" ma:displayName="MediaServiceAutoKeyPoints" ma:hidden="true" ma:internalName="MediaServiceAutoKeyPoints" ma:readOnly="true">
+      <xsd:simpleType>
+        <xsd:restriction base="dms:Note"/>
+      </xsd:simpleType>
+    </xsd:element>
+    <xsd:element name="MediaServiceKeyPoints" ma:index="20" nillable="true" ma:displayName="KeyPoints" ma:internalName="MediaServiceKeyPoints" ma:readOnly="true">
+      <xsd:simpleType>
+        <xsd:restriction base="dms:Note">
+          <xsd:maxLength value="255"/>
+        </xsd:restriction>
+      </xsd:simpleType>
+    </xsd:element>
+    <xsd:element name="MediaServiceLocation" ma:index="21" nillable="true" ma:displayName="Location" ma:indexed="true" ma:internalName="MediaServiceLocation" ma:readOnly="true">
+      <xsd:simpleType>
+        <xsd:restriction base="dms:Text"/>
+      </xsd:simpleType>
+    </xsd:element>
+    <xsd:element name="MediaServiceSearchProperties" ma:index="22" nillable="true" ma:displayName="MediaServiceSearchProperties" ma:hidden="true" ma:internalName="MediaServiceSearchProperties" ma:readOnly="true">
+      <xsd:simpleType>
+        <xsd:restriction base="dms:Note"/>
+      </xsd:simpleType>
+    </xsd:element>
+    <xsd:element name="_activity" ma:index="23" nillable="true" ma:displayName="_activity" ma:hidden="true" ma:internalName="_activity">
+      <xsd:simpleType>
+        <xsd:restriction base="dms:Note"/>
+      </xsd:simpleType>
+    </xsd:element>
+    <xsd:element name="MediaServiceObjectDetectorVersions" ma:index="24" nillable="true" ma:displayName="MediaServiceObjectDetectorVersions" ma:hidden="true" ma:indexed="true" ma:internalName="MediaServiceObjectDetectorVersions" ma:readOnly="true">
+      <xsd:simpleType>
+        <xsd:restriction base="dms:Text"/>
+      </xsd:simpleType>
+    </xsd:element>
+    <xsd:element name="MediaServiceSystemTags" ma:index="25" nillable="true" ma:displayName="MediaServiceSystemTags" ma:hidden="true" ma:internalName="MediaServiceSystemTags" ma:readOnly="true">
+      <xsd:simpleType>
+        <xsd:restriction base="dms:Note"/>
+      </xsd:simpleType>
+    </xsd:element>
+  </xsd:schema>
+  <xsd:schema xmlns:xsd="http://www.w3.org/2001/XMLSchema" xmlns:xs="http://www.w3.org/2001/XMLSchema" xmlns:dms="http://schemas.microsoft.com/office/2006/documentManagement/types" xmlns:pc="http://schemas.microsoft.com/office/infopath/2007/PartnerControls" targetNamespace="026c264a-64f6-48aa-bde0-8bf9e5064f89" elementFormDefault="qualified">
+    <xsd:import namespace="http://schemas.microsoft.com/office/2006/documentManagement/types"/>
+    <xsd:import namespace="http://schemas.microsoft.com/office/infopath/2007/PartnerControls"/>
+    <xsd:element name="SharedWithUsers" ma:index="10" nillable="true" ma:displayName="Shared With" ma:internalName="SharedWithUsers" ma:readOnly="true">
+      <xsd:complexType>
+        <xsd:complexContent>
+          <xsd:extension base="dms:UserMulti">
+            <xsd:sequence>
+              <xsd:element name="UserInfo" minOccurs="0" maxOccurs="unbounded">
+                <xsd:complexType>
+                  <xsd:sequence>
+                    <xsd:element name="DisplayName" type="xsd:string" minOccurs="0"/>
+                    <xsd:element name="AccountId" type="dms:UserId" minOccurs="0" nillable="true"/>
+                    <xsd:element name="AccountType" type="xsd:string" minOccurs="0"/>
+                  </xsd:sequence>
+                </xsd:complexType>
+              </xsd:element>
+            </xsd:sequence>
+          </xsd:extension>
+        </xsd:complexContent>
+      </xsd:complexType>
+    </xsd:element>
+    <xsd:element name="SharedWithDetails" ma:index="11" nillable="true" ma:displayName="Shared With Details" ma:internalName="SharedWithDetails" ma:readOnly="true">
+      <xsd:simpleType>
+        <xsd:restriction base="dms:Note">
+          <xsd:maxLength value="255"/>
+        </xsd:restriction>
+      </xsd:simpleType>
+    </xsd:element>
+    <xsd:element name="SharingHintHash" ma:index="12" nillable="true" ma:displayName="Sharing Hint Hash" ma:hidden="true" ma:internalName="SharingHintHash" ma:readOnly="true">
+      <xsd:simpleType>
+        <xsd:restriction base="dms:Text"/>
+      </xsd:simpleType>
+    </xsd:element>
+  </xsd:schema>
+  <xsd:schema xmlns="http://schemas.openxmlformats.org/package/2006/metadata/core-properties" xmlns:xsd="http://www.w3.org/2001/XMLSchema" xmlns:xsi="http://www.w3.org/2001/XMLSchema-instance" xmlns:dc="http://purl.org/dc/elements/1.1/" xmlns:dcterms="http://purl.org/dc/terms/" xmlns:odoc="http://schemas.microsoft.com/internal/obd" targetNamespace="http://schemas.openxmlformats.org/package/2006/metadata/core-properties" elementFormDefault="qualified" attributeFormDefault="unqualified" blockDefault="#all">
+    <xsd:import namespace="http://purl.org/dc/elements/1.1/" schemaLocation="http://dublincore.org/schemas/xmls/qdc/2003/04/02/dc.xsd"/>
+    <xsd:import namespace="http://purl.org/dc/terms/" schemaLocation="http://dublincore.org/schemas/xmls/qdc/2003/04/02/dcterms.xsd"/>
+    <xsd:element name="coreProperties" type="CT_coreProperties"/>
+    <xsd:complexType name="CT_coreProperties">
+      <xsd:all>
+        <xsd:element ref="dc:creator" minOccurs="0" maxOccurs="1"/>
+        <xsd:element ref="dcterms:created" minOccurs="0" maxOccurs="1"/>
+        <xsd:element ref="dc:identifier" minOccurs="0" maxOccurs="1"/>
+        <xsd:element name="contentType" minOccurs="0" maxOccurs="1" type="xsd:string" ma:index="0" ma:displayName="Content Type"/>
+        <xsd:element ref="dc:title" minOccurs="0" maxOccurs="1" ma:index="4" ma:displayName="Title"/>
+        <xsd:element ref="dc:subject" minOccurs="0" maxOccurs="1"/>
+        <xsd:element ref="dc:description" minOccurs="0" maxOccurs="1"/>
+        <xsd:element name="keywords" minOccurs="0" maxOccurs="1" type="xsd:string"/>
+        <xsd:element ref="dc:language" minOccurs="0" maxOccurs="1"/>
+        <xsd:element name="category" minOccurs="0" maxOccurs="1" type="xsd:string"/>
+        <xsd:element name="version" minOccurs="0" maxOccurs="1" type="xsd:string"/>
+        <xsd:element name="revision" minOccurs="0" maxOccurs="1" type="xsd:string">
+          <xsd:annotation>
+            <xsd:documentation>
+                        This value indicates the number of saves or revisions. The application is responsible for updating this value after each revision.
+                    </xsd:documentation>
+          </xsd:annotation>
+        </xsd:element>
+        <xsd:element name="lastModifiedBy" minOccurs="0" maxOccurs="1" type="xsd:string"/>
+        <xsd:element ref="dcterms:modified" minOccurs="0" maxOccurs="1"/>
+        <xsd:element name="contentStatus" minOccurs="0" maxOccurs="1" type="xsd:string"/>
+      </xsd:all>
+    </xsd:complexType>
+  </xsd:schema>
+  <xs:schema xmlns:pc="http://schemas.microsoft.com/office/infopath/2007/PartnerControls" xmlns:xs="http://www.w3.org/2001/XMLSchema" targetNamespace="http://schemas.microsoft.com/office/infopath/2007/PartnerControls" elementFormDefault="qualified" attributeFormDefault="unqualified">
+    <xs:element name="Person">
+      <xs:complexType>
+        <xs:sequence>
+          <xs:element ref="pc:DisplayName" minOccurs="0"/>
+          <xs:element ref="pc:AccountId" minOccurs="0"/>
+          <xs:element ref="pc:AccountType" minOccurs="0"/>
+        </xs:sequence>
+      </xs:complexType>
+    </xs:element>
+    <xs:element name="DisplayName" type="xs:string"/>
+    <xs:element name="AccountId" type="xs:string"/>
+    <xs:element name="AccountType" type="xs:string"/>
+    <xs:element name="BDCAssociatedEntity">
+      <xs:complexType>
+        <xs:sequence>
+          <xs:element ref="pc:BDCEntity" minOccurs="0" maxOccurs="unbounded"/>
+        </xs:sequence>
+        <xs:attribute ref="pc:EntityNamespace"/>
+        <xs:attribute ref="pc:EntityName"/>
+        <xs:attribute ref="pc:SystemInstanceName"/>
+        <xs:attribute ref="pc:AssociationName"/>
+      </xs:complexType>
+    </xs:element>
+    <xs:attribute name="EntityNamespace" type="xs:string"/>
+    <xs:attribute name="EntityName" type="xs:string"/>
+    <xs:attribute name="SystemInstanceName" type="xs:string"/>
+    <xs:attribute name="AssociationName" type="xs:string"/>
+    <xs:element name="BDCEntity">
+      <xs:complexType>
+        <xs:sequence>
+          <xs:element ref="pc:EntityDisplayName" minOccurs="0"/>
+          <xs:element ref="pc:EntityInstanceReference" minOccurs="0"/>
+          <xs:element ref="pc:EntityId1" minOccurs="0"/>
+          <xs:element ref="pc:EntityId2" minOccurs="0"/>
+          <xs:element ref="pc:EntityId3" minOccurs="0"/>
+          <xs:element ref="pc:EntityId4" minOccurs="0"/>
+          <xs:element ref="pc:EntityId5" minOccurs="0"/>
+        </xs:sequence>
+      </xs:complexType>
+    </xs:element>
+    <xs:element name="EntityDisplayName" type="xs:string"/>
+    <xs:element name="EntityInstanceReference" type="xs:string"/>
+    <xs:element name="EntityId1" type="xs:string"/>
+    <xs:element name="EntityId2" type="xs:string"/>
+    <xs:element name="EntityId3" type="xs:string"/>
+    <xs:element name="EntityId4" type="xs:string"/>
+    <xs:element name="EntityId5" type="xs:string"/>
+    <xs:element name="Terms">
+      <xs:complexType>
+        <xs:sequence>
+          <xs:element ref="pc:TermInfo" minOccurs="0" maxOccurs="unbounded"/>
+        </xs:sequence>
+      </xs:complexType>
+    </xs:element>
+    <xs:element name="TermInfo">
+      <xs:complexType>
+        <xs:sequence>
+          <xs:element ref="pc:TermName" minOccurs="0"/>
+          <xs:element ref="pc:TermId" minOccurs="0"/>
+        </xs:sequence>
+      </xs:complexType>
+    </xs:element>
+    <xs:element name="TermName" type="xs:string"/>
+    <xs:element name="TermId" type="xs:string"/>
+  </xs:schema>
+</ct:contentTypeSchema>
+</file>
+
+<file path=customXml/item2.xml><?xml version="1.0" encoding="utf-8"?>
+<?mso-contentType ?>
+<FormTemplates xmlns="http://schemas.microsoft.com/sharepoint/v3/contenttype/forms">
+  <Display>DocumentLibraryForm</Display>
+  <Edit>DocumentLibraryForm</Edit>
+  <New>DocumentLibraryForm</New>
+</FormTemplates>
+</file>
+
+<file path=customXml/item3.xml><?xml version="1.0" encoding="utf-8"?>
+<p:properties xmlns:p="http://schemas.microsoft.com/office/2006/metadata/properties" xmlns:xsi="http://www.w3.org/2001/XMLSchema-instance" xmlns:pc="http://schemas.microsoft.com/office/infopath/2007/PartnerControls">
+  <documentManagement>
+    <_activity xmlns="10322600-47b9-44f6-86ef-c87c87ba6e82" xsi:nil="true"/>
+  </documentManagement>
+</p:properties>
+</file>
+
+<file path=customXml/itemProps1.xml><?xml version="1.0" encoding="utf-8"?>
+<ds:datastoreItem xmlns:ds="http://schemas.openxmlformats.org/officeDocument/2006/customXml" ds:itemID="{43BF8E7A-7F85-4B5C-91EE-1390147153F1}">
+  <ds:schemaRefs>
+    <ds:schemaRef ds:uri="http://schemas.microsoft.com/office/2006/metadata/contentType"/>
+    <ds:schemaRef ds:uri="http://schemas.microsoft.com/office/2006/metadata/properties/metaAttributes"/>
+    <ds:schemaRef ds:uri="http://www.w3.org/2001/XMLSchema"/>
+    <ds:schemaRef ds:uri="http://schemas.microsoft.com/office/2006/metadata/properties"/>
+    <ds:schemaRef ds:uri="10322600-47b9-44f6-86ef-c87c87ba6e82"/>
+    <ds:schemaRef ds:uri="026c264a-64f6-48aa-bde0-8bf9e5064f89"/>
+    <ds:schemaRef ds:uri="http://schemas.microsoft.com/office/2006/documentManagement/types"/>
+    <ds:schemaRef ds:uri="http://schemas.microsoft.com/office/infopath/2007/PartnerControls"/>
+    <ds:schemaRef ds:uri="http://schemas.openxmlformats.org/package/2006/metadata/core-properties"/>
+    <ds:schemaRef ds:uri="http://purl.org/dc/elements/1.1/"/>
+    <ds:schemaRef ds:uri="http://purl.org/dc/terms/"/>
+    <ds:schemaRef ds:uri="http://schemas.microsoft.com/internal/obd"/>
+  </ds:schemaRefs>
+</ds:datastoreItem>
+</file>
+
+<file path=customXml/itemProps2.xml><?xml version="1.0" encoding="utf-8"?>
+<ds:datastoreItem xmlns:ds="http://schemas.openxmlformats.org/officeDocument/2006/customXml" ds:itemID="{D67F36EB-496F-4262-A9FD-0843EF3B6D81}">
+  <ds:schemaRefs>
+    <ds:schemaRef ds:uri="http://schemas.microsoft.com/sharepoint/v3/contenttype/forms"/>
+  </ds:schemaRefs>
+</ds:datastoreItem>
+</file>
+
+<file path=customXml/itemProps3.xml><?xml version="1.0" encoding="utf-8"?>
+<ds:datastoreItem xmlns:ds="http://schemas.openxmlformats.org/officeDocument/2006/customXml" ds:itemID="{0377E4F8-F73A-4838-818D-26069B242819}">
+  <ds:schemaRefs>
+    <ds:schemaRef ds:uri="http://schemas.microsoft.com/office/2006/metadata/properties"/>
+    <ds:schemaRef ds:uri="http://schemas.microsoft.com/office/infopath/2007/PartnerControls"/>
+    <ds:schemaRef ds:uri="10322600-47b9-44f6-86ef-c87c87ba6e82"/>
+  </ds:schemaRefs>
+</ds:datastoreItem>
 </file>
--- a/slides/T319_Regressão_Linear (Parte IV).pptx
+++ b/slides/T319_Regressão_Linear (Parte IV).pptx
@@ -11849,8 +11849,8 @@
           </a:p>
         </p:txBody>
       </p:sp>
-      <mc:AlternateContent xmlns:mc="http://schemas.openxmlformats.org/markup-compatibility/2006">
-        <mc:Choice xmlns:a14="http://schemas.microsoft.com/office/drawing/2010/main" Requires="a14">
+      <mc:AlternateContent xmlns:mc="http://schemas.openxmlformats.org/markup-compatibility/2006" xmlns:a14="http://schemas.microsoft.com/office/drawing/2010/main">
+        <mc:Choice Requires="a14">
           <p:sp>
             <p:nvSpPr>
               <p:cNvPr id="3" name="Espaço Reservado para Conteúdo 2">
@@ -12768,7 +12768,7 @@
             </p:txBody>
           </p:sp>
         </mc:Choice>
-        <mc:Fallback>
+        <mc:Fallback xmlns="">
           <p:sp>
             <p:nvSpPr>
               <p:cNvPr id="3" name="Espaço Reservado para Conteúdo 2">
@@ -13189,8 +13189,8 @@
           </a:p>
         </p:txBody>
       </p:sp>
-      <mc:AlternateContent xmlns:mc="http://schemas.openxmlformats.org/markup-compatibility/2006">
-        <mc:Choice xmlns:a14="http://schemas.microsoft.com/office/drawing/2010/main" Requires="a14">
+      <mc:AlternateContent xmlns:mc="http://schemas.openxmlformats.org/markup-compatibility/2006" xmlns:a14="http://schemas.microsoft.com/office/drawing/2010/main">
+        <mc:Choice Requires="a14">
           <p:sp>
             <p:nvSpPr>
               <p:cNvPr id="3" name="Espaço Reservado para Conteúdo 2">
@@ -14388,7 +14388,7 @@
             </p:txBody>
           </p:sp>
         </mc:Choice>
-        <mc:Fallback>
+        <mc:Fallback xmlns="">
           <p:sp>
             <p:nvSpPr>
               <p:cNvPr id="3" name="Espaço Reservado para Conteúdo 2">
@@ -14490,8 +14490,8 @@
           </a:p>
         </p:txBody>
       </p:sp>
-      <mc:AlternateContent xmlns:mc="http://schemas.openxmlformats.org/markup-compatibility/2006">
-        <mc:Choice xmlns:a14="http://schemas.microsoft.com/office/drawing/2010/main" Requires="a14">
+      <mc:AlternateContent xmlns:mc="http://schemas.openxmlformats.org/markup-compatibility/2006" xmlns:a14="http://schemas.microsoft.com/office/drawing/2010/main">
+        <mc:Choice Requires="a14">
           <p:sp>
             <p:nvSpPr>
               <p:cNvPr id="3" name="Espaço Reservado para Conteúdo 2">
@@ -15678,7 +15678,7 @@
             </p:txBody>
           </p:sp>
         </mc:Choice>
-        <mc:Fallback>
+        <mc:Fallback xmlns="">
           <p:sp>
             <p:nvSpPr>
               <p:cNvPr id="3" name="Espaço Reservado para Conteúdo 2">
@@ -16076,8 +16076,8 @@
           </a:p>
         </p:txBody>
       </p:sp>
-      <mc:AlternateContent xmlns:mc="http://schemas.openxmlformats.org/markup-compatibility/2006">
-        <mc:Choice xmlns:a14="http://schemas.microsoft.com/office/drawing/2010/main" Requires="a14">
+      <mc:AlternateContent xmlns:mc="http://schemas.openxmlformats.org/markup-compatibility/2006" xmlns:a14="http://schemas.microsoft.com/office/drawing/2010/main">
+        <mc:Choice Requires="a14">
           <p:sp>
             <p:nvSpPr>
               <p:cNvPr id="3" name="Content Placeholder 2"/>
@@ -16679,7 +16679,7 @@
             </p:txBody>
           </p:sp>
         </mc:Choice>
-        <mc:Fallback>
+        <mc:Fallback xmlns="">
           <p:sp>
             <p:nvSpPr>
               <p:cNvPr id="3" name="Content Placeholder 2"/>
@@ -30101,6 +30101,15 @@
 </file>
 
 <file path=customXml/item1.xml><?xml version="1.0" encoding="utf-8"?>
+<?mso-contentType ?>
+<FormTemplates xmlns="http://schemas.microsoft.com/sharepoint/v3/contenttype/forms">
+  <Display>DocumentLibraryForm</Display>
+  <Edit>DocumentLibraryForm</Edit>
+  <New>DocumentLibraryForm</New>
+</FormTemplates>
+</file>
+
+<file path=customXml/item2.xml><?xml version="1.0" encoding="utf-8"?>
 <ct:contentTypeSchema xmlns:ct="http://schemas.microsoft.com/office/2006/metadata/contentType" xmlns:ma="http://schemas.microsoft.com/office/2006/metadata/properties/metaAttributes" ct:_="" ma:_="" ma:contentTypeName="Document" ma:contentTypeID="0x010100A6553FE09A98904B92A9D00A38127206" ma:contentTypeVersion="18" ma:contentTypeDescription="Create a new document." ma:contentTypeScope="" ma:versionID="92863cfdd2d5fd2ee9b6f30d8c51b1f5">
   <xsd:schema xmlns:xsd="http://www.w3.org/2001/XMLSchema" xmlns:xs="http://www.w3.org/2001/XMLSchema" xmlns:p="http://schemas.microsoft.com/office/2006/metadata/properties" xmlns:ns3="10322600-47b9-44f6-86ef-c87c87ba6e82" xmlns:ns4="026c264a-64f6-48aa-bde0-8bf9e5064f89" targetNamespace="http://schemas.microsoft.com/office/2006/metadata/properties" ma:root="true" ma:fieldsID="86148dd4b4cd32a5258cd233a95bdcf5" ns3:_="" ns4:_="">
     <xsd:import namespace="10322600-47b9-44f6-86ef-c87c87ba6e82"/>
@@ -30353,15 +30362,6 @@
 </ct:contentTypeSchema>
 </file>
 
-<file path=customXml/item2.xml><?xml version="1.0" encoding="utf-8"?>
-<?mso-contentType ?>
-<FormTemplates xmlns="http://schemas.microsoft.com/sharepoint/v3/contenttype/forms">
-  <Display>DocumentLibraryForm</Display>
-  <Edit>DocumentLibraryForm</Edit>
-  <New>DocumentLibraryForm</New>
-</FormTemplates>
-</file>
-
 <file path=customXml/item3.xml><?xml version="1.0" encoding="utf-8"?>
 <p:properties xmlns:p="http://schemas.microsoft.com/office/2006/metadata/properties" xmlns:xsi="http://www.w3.org/2001/XMLSchema-instance" xmlns:pc="http://schemas.microsoft.com/office/infopath/2007/PartnerControls">
   <documentManagement>
@@ -30371,6 +30371,14 @@
 </file>
 
 <file path=customXml/itemProps1.xml><?xml version="1.0" encoding="utf-8"?>
+<ds:datastoreItem xmlns:ds="http://schemas.openxmlformats.org/officeDocument/2006/customXml" ds:itemID="{D67F36EB-496F-4262-A9FD-0843EF3B6D81}">
+  <ds:schemaRefs>
+    <ds:schemaRef ds:uri="http://schemas.microsoft.com/sharepoint/v3/contenttype/forms"/>
+  </ds:schemaRefs>
+</ds:datastoreItem>
+</file>
+
+<file path=customXml/itemProps2.xml><?xml version="1.0" encoding="utf-8"?>
 <ds:datastoreItem xmlns:ds="http://schemas.openxmlformats.org/officeDocument/2006/customXml" ds:itemID="{43BF8E7A-7F85-4B5C-91EE-1390147153F1}">
   <ds:schemaRefs>
     <ds:schemaRef ds:uri="http://schemas.microsoft.com/office/2006/metadata/contentType"/>
@@ -30389,14 +30397,6 @@
 </ds:datastoreItem>
 </file>
 
-<file path=customXml/itemProps2.xml><?xml version="1.0" encoding="utf-8"?>
-<ds:datastoreItem xmlns:ds="http://schemas.openxmlformats.org/officeDocument/2006/customXml" ds:itemID="{D67F36EB-496F-4262-A9FD-0843EF3B6D81}">
-  <ds:schemaRefs>
-    <ds:schemaRef ds:uri="http://schemas.microsoft.com/sharepoint/v3/contenttype/forms"/>
-  </ds:schemaRefs>
-</ds:datastoreItem>
-</file>
-
 <file path=customXml/itemProps3.xml><?xml version="1.0" encoding="utf-8"?>
 <ds:datastoreItem xmlns:ds="http://schemas.openxmlformats.org/officeDocument/2006/customXml" ds:itemID="{0377E4F8-F73A-4838-818D-26069B242819}">
   <ds:schemaRefs>

--- a/slides/T319_Regressão_Linear (Parte IV).pptx
+++ b/slides/T319_Regressão_Linear (Parte IV).pptx
@@ -9895,7 +9895,7 @@
         <p:spPr>
           <a:xfrm>
             <a:off x="838199" y="1825624"/>
-            <a:ext cx="11219121" cy="2931859"/>
+            <a:ext cx="11353801" cy="2931859"/>
           </a:xfrm>
         </p:spPr>
         <p:txBody>
@@ -9918,7 +9918,7 @@
             </a:r>
             <a:r>
               <a:rPr lang="pt-BR" dirty="0"/>
-              <a:t>do gradiente descendente, pois deixa a superfície de erro mais circular </a:t>
+              <a:t>do gradiente descendente, pois deixa a superfície de erro mais circular.</a:t>
             </a:r>
           </a:p>
           <a:p>
@@ -10242,7 +10242,7 @@
         <p:spPr>
           <a:xfrm>
             <a:off x="838199" y="1825624"/>
-            <a:ext cx="11219121" cy="2931859"/>
+            <a:ext cx="11353801" cy="2931859"/>
           </a:xfrm>
         </p:spPr>
         <p:txBody>
@@ -10289,7 +10289,22 @@
               <a:rPr lang="pt-BR" b="0" i="0" dirty="0">
                 <a:effectLst/>
               </a:rPr>
-              <a:t>ois os pesos representam o impacto dos atributos nas predições (importância para o modelo).</a:t>
+              <a:t>ois os pesos representam o </a:t>
+            </a:r>
+            <a:r>
+              <a:rPr lang="pt-BR" b="1" i="1" dirty="0">
+                <a:solidFill>
+                  <a:schemeClr val="accent2"/>
+                </a:solidFill>
+                <a:effectLst/>
+              </a:rPr>
+              <a:t>impacto dos atributos</a:t>
+            </a:r>
+            <a:r>
+              <a:rPr lang="pt-BR" b="0" i="0" dirty="0">
+                <a:effectLst/>
+              </a:rPr>
+              <a:t> nas predições (importância para o modelo).</a:t>
             </a:r>
           </a:p>
           <a:p>
@@ -11849,8 +11864,8 @@
           </a:p>
         </p:txBody>
       </p:sp>
-      <mc:AlternateContent xmlns:mc="http://schemas.openxmlformats.org/markup-compatibility/2006" xmlns:a14="http://schemas.microsoft.com/office/drawing/2010/main">
-        <mc:Choice Requires="a14">
+      <mc:AlternateContent xmlns:mc="http://schemas.openxmlformats.org/markup-compatibility/2006">
+        <mc:Choice xmlns:a14="http://schemas.microsoft.com/office/drawing/2010/main" Requires="a14">
           <p:sp>
             <p:nvSpPr>
               <p:cNvPr id="3" name="Espaço Reservado para Conteúdo 2">
@@ -12598,7 +12613,19 @@
                 </a:r>
                 <a:r>
                   <a:rPr lang="pt-BR" sz="2800" dirty="0"/>
-                  <a:t>grau do polinômio é o maior valor resultante da </a:t>
+                  <a:t>grau do polinômio é o </a:t>
+                </a:r>
+                <a:r>
+                  <a:rPr lang="pt-BR" sz="2800" b="1" i="1" dirty="0">
+                    <a:solidFill>
+                      <a:schemeClr val="accent2"/>
+                    </a:solidFill>
+                  </a:rPr>
+                  <a:t>maior valor</a:t>
+                </a:r>
+                <a:r>
+                  <a:rPr lang="pt-BR" sz="2800" dirty="0"/>
+                  <a:t> resultante da </a:t>
                 </a:r>
                 <a:r>
                   <a:rPr lang="pt-BR" sz="2800" b="1" i="1" dirty="0">
@@ -12768,7 +12795,7 @@
             </p:txBody>
           </p:sp>
         </mc:Choice>
-        <mc:Fallback xmlns="">
+        <mc:Fallback>
           <p:sp>
             <p:nvSpPr>
               <p:cNvPr id="3" name="Espaço Reservado para Conteúdo 2">
@@ -12802,7 +12829,7 @@
               <a:lstStyle/>
               <a:p>
                 <a:r>
-                  <a:rPr lang="en-US">
+                  <a:rPr lang="pt-BR">
                     <a:noFill/>
                   </a:rPr>
                   <a:t> </a:t>
@@ -28729,7 +28756,7 @@
                   <a:schemeClr val="accent2"/>
                 </a:solidFill>
               </a:rPr>
-              <a:t>são os atributos que influenciam o formato</a:t>
+              <a:t>são os atributos que influenciam o formato da superfície</a:t>
             </a:r>
             <a:r>
               <a:rPr lang="pt-BR" i="1" dirty="0">
@@ -28737,7 +28764,7 @@
                   <a:schemeClr val="accent2"/>
                 </a:solidFill>
               </a:rPr>
-              <a:t> da superfície </a:t>
+              <a:t> </a:t>
             </a:r>
             <a:r>
               <a:rPr lang="pt-BR" dirty="0"/>
@@ -30101,15 +30128,6 @@
 </file>
 
 <file path=customXml/item1.xml><?xml version="1.0" encoding="utf-8"?>
-<?mso-contentType ?>
-<FormTemplates xmlns="http://schemas.microsoft.com/sharepoint/v3/contenttype/forms">
-  <Display>DocumentLibraryForm</Display>
-  <Edit>DocumentLibraryForm</Edit>
-  <New>DocumentLibraryForm</New>
-</FormTemplates>
-</file>
-
-<file path=customXml/item2.xml><?xml version="1.0" encoding="utf-8"?>
 <ct:contentTypeSchema xmlns:ct="http://schemas.microsoft.com/office/2006/metadata/contentType" xmlns:ma="http://schemas.microsoft.com/office/2006/metadata/properties/metaAttributes" ct:_="" ma:_="" ma:contentTypeName="Document" ma:contentTypeID="0x010100A6553FE09A98904B92A9D00A38127206" ma:contentTypeVersion="18" ma:contentTypeDescription="Create a new document." ma:contentTypeScope="" ma:versionID="92863cfdd2d5fd2ee9b6f30d8c51b1f5">
   <xsd:schema xmlns:xsd="http://www.w3.org/2001/XMLSchema" xmlns:xs="http://www.w3.org/2001/XMLSchema" xmlns:p="http://schemas.microsoft.com/office/2006/metadata/properties" xmlns:ns3="10322600-47b9-44f6-86ef-c87c87ba6e82" xmlns:ns4="026c264a-64f6-48aa-bde0-8bf9e5064f89" targetNamespace="http://schemas.microsoft.com/office/2006/metadata/properties" ma:root="true" ma:fieldsID="86148dd4b4cd32a5258cd233a95bdcf5" ns3:_="" ns4:_="">
     <xsd:import namespace="10322600-47b9-44f6-86ef-c87c87ba6e82"/>
@@ -30362,6 +30380,15 @@
 </ct:contentTypeSchema>
 </file>
 
+<file path=customXml/item2.xml><?xml version="1.0" encoding="utf-8"?>
+<?mso-contentType ?>
+<FormTemplates xmlns="http://schemas.microsoft.com/sharepoint/v3/contenttype/forms">
+  <Display>DocumentLibraryForm</Display>
+  <Edit>DocumentLibraryForm</Edit>
+  <New>DocumentLibraryForm</New>
+</FormTemplates>
+</file>
+
 <file path=customXml/item3.xml><?xml version="1.0" encoding="utf-8"?>
 <p:properties xmlns:p="http://schemas.microsoft.com/office/2006/metadata/properties" xmlns:xsi="http://www.w3.org/2001/XMLSchema-instance" xmlns:pc="http://schemas.microsoft.com/office/infopath/2007/PartnerControls">
   <documentManagement>
@@ -30371,14 +30398,6 @@
 </file>
 
 <file path=customXml/itemProps1.xml><?xml version="1.0" encoding="utf-8"?>
-<ds:datastoreItem xmlns:ds="http://schemas.openxmlformats.org/officeDocument/2006/customXml" ds:itemID="{D67F36EB-496F-4262-A9FD-0843EF3B6D81}">
-  <ds:schemaRefs>
-    <ds:schemaRef ds:uri="http://schemas.microsoft.com/sharepoint/v3/contenttype/forms"/>
-  </ds:schemaRefs>
-</ds:datastoreItem>
-</file>
-
-<file path=customXml/itemProps2.xml><?xml version="1.0" encoding="utf-8"?>
 <ds:datastoreItem xmlns:ds="http://schemas.openxmlformats.org/officeDocument/2006/customXml" ds:itemID="{43BF8E7A-7F85-4B5C-91EE-1390147153F1}">
   <ds:schemaRefs>
     <ds:schemaRef ds:uri="http://schemas.microsoft.com/office/2006/metadata/contentType"/>
@@ -30397,6 +30416,14 @@
 </ds:datastoreItem>
 </file>
 
+<file path=customXml/itemProps2.xml><?xml version="1.0" encoding="utf-8"?>
+<ds:datastoreItem xmlns:ds="http://schemas.openxmlformats.org/officeDocument/2006/customXml" ds:itemID="{D67F36EB-496F-4262-A9FD-0843EF3B6D81}">
+  <ds:schemaRefs>
+    <ds:schemaRef ds:uri="http://schemas.microsoft.com/sharepoint/v3/contenttype/forms"/>
+  </ds:schemaRefs>
+</ds:datastoreItem>
+</file>
+
 <file path=customXml/itemProps3.xml><?xml version="1.0" encoding="utf-8"?>
 <ds:datastoreItem xmlns:ds="http://schemas.openxmlformats.org/officeDocument/2006/customXml" ds:itemID="{0377E4F8-F73A-4838-818D-26069B242819}">
   <ds:schemaRefs>
